--- a/docs/content/joins/joins_lecture.pptx
+++ b/docs/content/joins/joins_lecture.pptx
@@ -3304,7 +3304,7 @@
             </a:pPr>
             <a:r>
               <a:rPr/>
-              <a:t>Lecture 12 — Joins: Combining Two Tables</a:t>
+              <a:t>Lecture 17 — Joins: Combining Two Tables</a:t>
             </a:r>
           </a:p>
         </p:txBody>
@@ -3365,7 +3365,7 @@
             </a:pPr>
             <a:r>
               <a:rPr/>
-              <a:t>2026-07-05</a:t>
+              <a:t>2026-08-27</a:t>
             </a:r>
           </a:p>
         </p:txBody>
@@ -4374,7 +4374,37 @@
             </a:pPr>
             <a:r>
               <a:rPr sz="2000"/>
-              <a:t>When dplyr prints </a:t>
+              <a:t>Nothing here throws an error, so nothing forces you to notice — </a:t>
+            </a:r>
+            <a:r>
+              <a:rPr sz="2000">
+                <a:latin typeface="Courier"/>
+              </a:rPr>
+              <a:t>reports_df</a:t>
+            </a:r>
+            <a:r>
+              <a:rPr sz="2000"/>
+              <a:t> and </a:t>
+            </a:r>
+            <a:r>
+              <a:rPr sz="2000">
+                <a:latin typeface="Courier"/>
+              </a:rPr>
+              <a:t>locations_df</a:t>
+            </a:r>
+            <a:r>
+              <a:rPr sz="2000"/>
+              <a:t> both got the same made-up </a:t>
+            </a:r>
+            <a:r>
+              <a:rPr sz="2000">
+                <a:latin typeface="Courier"/>
+              </a:rPr>
+              <a:t>index</a:t>
+            </a:r>
+            <a:r>
+              <a:rPr sz="2000"/>
+              <a:t> column at some point, dplyr matches on it happily, and you end up with row 1’s coordinates glued to row 1’s report regardless of which Bigfoot sighting it actually was. If the message </a:t>
             </a:r>
             <a:r>
               <a:rPr sz="2000" i="1"/>
@@ -4392,45 +4422,7 @@
             </a:r>
             <a:r>
               <a:rPr sz="2000"/>
-              <a:t> and you didn’t choose that column — </a:t>
-            </a:r>
-            <a:r>
-              <a:rPr sz="2000" b="1"/>
-              <a:t>stop</a:t>
-            </a:r>
-            <a:r>
-              <a:rPr sz="2000"/>
-              <a:t>. Auto-joining on an accidental shared name (</a:t>
-            </a:r>
-            <a:r>
-              <a:rPr sz="2000">
-                <a:latin typeface="Courier"/>
-              </a:rPr>
-              <a:t>index</a:t>
-            </a:r>
-            <a:r>
-              <a:rPr sz="2000"/>
-              <a:t>, </a:t>
-            </a:r>
-            <a:r>
-              <a:rPr sz="2000">
-                <a:latin typeface="Courier"/>
-              </a:rPr>
-              <a:t>id</a:t>
-            </a:r>
-            <a:r>
-              <a:rPr sz="2000"/>
-              <a:t>, </a:t>
-            </a:r>
-            <a:r>
-              <a:rPr sz="2000">
-                <a:latin typeface="Courier"/>
-              </a:rPr>
-              <a:t>x</a:t>
-            </a:r>
-            <a:r>
-              <a:rPr sz="2000"/>
-              <a:t>) is a classic silent bug. Name your key every time.</a:t>
+              <a:t> names a column you didn’t pick, treat it as a bug report, not a status update.</a:t>
             </a:r>
           </a:p>
         </p:txBody>
@@ -5717,7 +5709,7 @@
             </a:pPr>
             <a:r>
               <a:rPr sz="2000" b="1"/>
-              <a:t>✅ Key idea</a:t>
+              <a:t>✅ Choosing among the three</a:t>
             </a:r>
           </a:p>
           <a:p>
@@ -5726,21 +5718,23 @@
             </a:pPr>
             <a:r>
               <a:rPr sz="2000"/>
-              <a:t>Start from the question: </a:t>
-            </a:r>
-            <a:r>
-              <a:rPr sz="2000" i="1"/>
-              <a:t>“Which rows do I refuse to lose?”</a:t>
+              <a:t>Ask which rows you’d be upset to lose. Drop a report from the map and a real sighting vanishes; drop a stray location record and nothing is lost. That’s why the map keeps every report — </a:t>
+            </a:r>
+            <a:r>
+              <a:rPr sz="2000">
+                <a:latin typeface="Courier"/>
+              </a:rPr>
+              <a:t>left_join</a:t>
             </a:r>
             <a:r>
               <a:rPr sz="2000"/>
-              <a:t> That answer picks your join. For mapping we refuse to lose reports, so </a:t>
+              <a:t>, not </a:t>
             </a:r>
             <a:r>
               <a:rPr sz="2000">
                 <a:latin typeface="Courier"/>
               </a:rPr>
-              <a:t>left_join</a:t>
+              <a:t>inner_join</a:t>
             </a:r>
             <a:r>
               <a:rPr sz="2000"/>
@@ -5882,7 +5876,7 @@
             </a:pPr>
             <a:r>
               <a:rPr/>
-              <a:t>Where we left off — ANOVA &amp; Factors</a:t>
+              <a:t>Where we left off — Factors</a:t>
             </a:r>
           </a:p>
         </p:txBody>
@@ -5901,17 +5895,6 @@
         <p:txBody>
           <a:bodyPr/>
           <a:lstStyle/>
-          <a:p>
-            <a:pPr lvl="0"/>
-            <a:r>
-              <a:rPr b="1"/>
-              <a:t>One-way ANOVA</a:t>
-            </a:r>
-            <a:r>
-              <a:rPr/>
-              <a:t> — compared a numeric response across several groups</a:t>
-            </a:r>
-          </a:p>
           <a:p>
             <a:pPr lvl="0"/>
             <a:r>
@@ -5920,7 +5903,14 @@
             </a:r>
             <a:r>
               <a:rPr/>
-              <a:t> — reordered and relabeled those groups for clean plots</a:t>
+              <a:t> — reordered and relabeled categorical levels for clean plots and models</a:t>
+            </a:r>
+          </a:p>
+          <a:p>
+            <a:pPr lvl="0"/>
+            <a:r>
+              <a:rPr/>
+              <a:t>Before that: reshaped messy data (Pivoting), started the final project, and ran a one-way ANOVA</a:t>
             </a:r>
           </a:p>
           <a:p>
@@ -7467,7 +7457,17 @@
             </a:r>
             <a:r>
               <a:rPr/>
-              <a:t> That’s the everyday work of data science.</a:t>
+              <a:t> </a:t>
+            </a:r>
+            <a:r>
+              <a:rPr>
+                <a:latin typeface="Courier"/>
+              </a:rPr>
+              <a:t>bigfoot_mappable</a:t>
+            </a:r>
+            <a:r>
+              <a:rPr/>
+              <a:t> didn’t exist in either source file — it only exists because you joined them on a key, and it’s the exact table Lecture 13 opens with.</a:t>
             </a:r>
           </a:p>
         </p:txBody>
@@ -7921,7 +7921,7 @@
             </a:pPr>
             <a:r>
               <a:rPr b="1"/>
-              <a:t>Up next — Lecture 13:</a:t>
+              <a:t>Up next — Lecture 18:</a:t>
             </a:r>
           </a:p>
           <a:p>
@@ -8471,44 +8471,90 @@
           <a:p>
             <a:pPr lvl="0"/>
             <a:r>
-              <a:rPr sz="2000" b="1"/>
-              <a:t>Predicting the row count</a:t>
-            </a:r>
-            <a:r>
               <a:rPr sz="2000"/>
-              <a:t> is the whole skill — a join that returns the wrong number of rows is the #1 data bug.</a:t>
+              <a:t>A join can run without error and still hand you the wrong table — the only way to catch that is to know the row count you expected </a:t>
+            </a:r>
+            <a:r>
+              <a:rPr sz="2000" i="1"/>
+              <a:t>before</a:t>
+            </a:r>
+            <a:r>
+              <a:rPr sz="2000"/>
+              <a:t> you see the actual one.</a:t>
             </a:r>
           </a:p>
           <a:p>
             <a:pPr lvl="0"/>
             <a:r>
-              <a:rPr sz="2000" b="1"/>
-              <a:t>Typing</a:t>
-            </a:r>
-            <a:r>
               <a:rPr sz="2000"/>
-              <a:t> builds the </a:t>
+              <a:t>Every join in this lecture takes </a:t>
             </a:r>
             <a:r>
               <a:rPr sz="2000">
                 <a:latin typeface="Courier"/>
               </a:rPr>
-              <a:t>*_join()</a:t>
+              <a:t>by = c("a" = "b")</a:t>
             </a:r>
             <a:r>
               <a:rPr sz="2000"/>
-              <a:t> muscle memory.</a:t>
+              <a:t> as an argument — typing that syntax a dozen times is what makes it automatic under deadline pressure.</a:t>
             </a:r>
           </a:p>
           <a:p>
             <a:pPr lvl="0"/>
             <a:r>
-              <a:rPr sz="2000" b="1"/>
-              <a:t>Chunk → practice</a:t>
-            </a:r>
-            <a:r>
               <a:rPr sz="2000"/>
-              <a:t> keeps each join type distinct.</a:t>
+              <a:t>Four short chunks instead of one long one means </a:t>
+            </a:r>
+            <a:r>
+              <a:rPr sz="2000">
+                <a:latin typeface="Courier"/>
+              </a:rPr>
+              <a:t>left_join</a:t>
+            </a:r>
+            <a:r>
+              <a:rPr sz="2000"/>
+              <a:t>, </a:t>
+            </a:r>
+            <a:r>
+              <a:rPr sz="2000">
+                <a:latin typeface="Courier"/>
+              </a:rPr>
+              <a:t>inner</a:t>
+            </a:r>
+            <a:r>
+              <a:rPr sz="2000"/>
+              <a:t>/</a:t>
+            </a:r>
+            <a:r>
+              <a:rPr sz="2000">
+                <a:latin typeface="Courier"/>
+              </a:rPr>
+              <a:t>full</a:t>
+            </a:r>
+            <a:r>
+              <a:rPr sz="2000"/>
+              <a:t>, and </a:t>
+            </a:r>
+            <a:r>
+              <a:rPr sz="2000">
+                <a:latin typeface="Courier"/>
+              </a:rPr>
+              <a:t>semi</a:t>
+            </a:r>
+            <a:r>
+              <a:rPr sz="2000"/>
+              <a:t>/</a:t>
+            </a:r>
+            <a:r>
+              <a:rPr sz="2000">
+                <a:latin typeface="Courier"/>
+              </a:rPr>
+              <a:t>anti</a:t>
+            </a:r>
+            <a:r>
+              <a:rPr sz="2000"/>
+              <a:t> each get their own uncluttered mental slot.</a:t>
             </a:r>
           </a:p>
         </p:txBody>

--- a/docs/content/joins/joins_lecture.pptx
+++ b/docs/content/joins/joins_lecture.pptx
@@ -3304,7 +3304,7 @@
             </a:pPr>
             <a:r>
               <a:rPr/>
-              <a:t>Lecture 17 — Joins: Combining Two Tables</a:t>
+              <a:t>Lecture — Joins: Combining Two Tables</a:t>
             </a:r>
           </a:p>
         </p:txBody>
@@ -3334,7 +3334,7 @@
             </a:pPr>
             <a:r>
               <a:rPr/>
-              <a:t>Keys, mutating joins, and filtering joins with real Bigfoot report data</a:t>
+              <a:t>Keys, mutating joins, and filtering joins on a fisher reintroduction dataset</a:t>
             </a:r>
             <a:br/>
             <a:br/>
@@ -3540,7 +3540,7 @@
             </a:r>
             <a:r>
               <a:rPr/>
-              <a:t> — Keep Every Report</a:t>
+              <a:t> — Keep Every Capture Event</a:t>
             </a:r>
           </a:p>
         </p:txBody>
@@ -3584,11 +3584,11 @@
               <a:rPr sz="2000">
                 <a:latin typeface="Courier"/>
               </a:rPr>
-              <a:t>reports_df</a:t>
+              <a:t>captures_df</a:t>
             </a:r>
             <a:r>
               <a:rPr sz="2000"/>
-              <a:t> has ~5,000 reports; only ~4,000 were geocoded. After a </a:t>
+              <a:t> has ~45 events; a few are unmarked animals. After a </a:t>
             </a:r>
             <a:r>
               <a:rPr sz="2000">
@@ -3598,7 +3598,7 @@
             </a:r>
             <a:r>
               <a:rPr sz="2000"/>
-              <a:t>, how many </a:t>
+              <a:t> (captures on the left), how many </a:t>
             </a:r>
             <a:r>
               <a:rPr sz="2000" b="1"/>
@@ -3606,7 +3606,17 @@
             </a:r>
             <a:r>
               <a:rPr sz="2000"/>
-              <a:t> will we have, and how many will have a latitude?</a:t>
+              <a:t> will we have, and how many will have a missing </a:t>
+            </a:r>
+            <a:r>
+              <a:rPr sz="2000">
+                <a:latin typeface="Courier"/>
+              </a:rPr>
+              <a:t>sex</a:t>
+            </a:r>
+            <a:r>
+              <a:rPr sz="2000"/>
+              <a:t>?</a:t>
             </a:r>
           </a:p>
         </p:txBody>
@@ -3668,7 +3678,7 @@
                 </a:solidFill>
                 <a:latin typeface="Courier"/>
               </a:rPr>
-              <a:t>bigfoot_df &lt;- reports_df </a:t>
+              <a:t>captures_joined &lt;- captures_df </a:t>
             </a:r>
             <a:r>
               <a:rPr>
@@ -3705,7 +3715,7 @@
                 </a:solidFill>
                 <a:latin typeface="Courier"/>
               </a:rPr>
-              <a:t>(locations_df, </a:t>
+              <a:t>(individuals_df, </a:t>
             </a:r>
             <a:r>
               <a:rPr>
@@ -3750,7 +3760,7 @@
                 </a:solidFill>
                 <a:latin typeface="Courier"/>
               </a:rPr>
-              <a:t>"REPORT_NUMBER"</a:t>
+              <a:t>"animal_id"</a:t>
             </a:r>
             <a:r>
               <a:rPr>
@@ -3768,7 +3778,7 @@
                 </a:solidFill>
                 <a:latin typeface="Courier"/>
               </a:rPr>
-              <a:t>"number"</a:t>
+              <a:t>"fisher_id"</a:t>
             </a:r>
             <a:r>
               <a:rPr>
@@ -3797,7 +3807,7 @@
                 </a:solidFill>
                 <a:latin typeface="Courier"/>
               </a:rPr>
-              <a:t>(bigfoot_df)                    </a:t>
+              <a:t>(captures_joined)                  </a:t>
             </a:r>
             <a:r>
               <a:rPr>
@@ -3806,7 +3816,7 @@
                 </a:solidFill>
                 <a:latin typeface="Courier"/>
               </a:rPr>
-              <a:t># every report is kept</a:t>
+              <a:t># every capture event is kept</a:t>
             </a:r>
           </a:p>
           <a:p>
@@ -3817,7 +3827,7 @@
               <a:rPr>
                 <a:latin typeface="Courier"/>
               </a:rPr>
-              <a:t>[1] 5022</a:t>
+              <a:t>[1] 45</a:t>
             </a:r>
           </a:p>
           <a:p>
@@ -3845,29 +3855,38 @@
             <a:r>
               <a:rPr>
                 <a:solidFill>
+                  <a:srgbClr val="4758AB"/>
+                </a:solidFill>
+                <a:latin typeface="Courier"/>
+              </a:rPr>
+              <a:t>is.na</a:t>
+            </a:r>
+            <a:r>
+              <a:rPr>
+                <a:solidFill>
+                  <a:srgbClr val="003B4F"/>
+                </a:solidFill>
+                <a:latin typeface="Courier"/>
+              </a:rPr>
+              <a:t>(captures_joined</a:t>
+            </a:r>
+            <a:r>
+              <a:rPr>
+                <a:solidFill>
                   <a:srgbClr val="5E5E5E"/>
                 </a:solidFill>
                 <a:latin typeface="Courier"/>
               </a:rPr>
-              <a:t>!</a:t>
-            </a:r>
-            <a:r>
-              <a:rPr>
-                <a:solidFill>
-                  <a:srgbClr val="4758AB"/>
-                </a:solidFill>
-                <a:latin typeface="Courier"/>
-              </a:rPr>
-              <a:t>is.na</a:t>
-            </a:r>
-            <a:r>
-              <a:rPr>
-                <a:solidFill>
-                  <a:srgbClr val="003B4F"/>
-                </a:solidFill>
-                <a:latin typeface="Courier"/>
-              </a:rPr>
-              <a:t>(bigfoot_df</a:t>
+              <a:t>$</a:t>
+            </a:r>
+            <a:r>
+              <a:rPr>
+                <a:solidFill>
+                  <a:srgbClr val="003B4F"/>
+                </a:solidFill>
+                <a:latin typeface="Courier"/>
+              </a:rPr>
+              <a:t>sex))        </a:t>
             </a:r>
             <a:r>
               <a:rPr>
@@ -3876,25 +3895,7 @@
                 </a:solidFill>
                 <a:latin typeface="Courier"/>
               </a:rPr>
-              <a:t>$</a:t>
-            </a:r>
-            <a:r>
-              <a:rPr>
-                <a:solidFill>
-                  <a:srgbClr val="003B4F"/>
-                </a:solidFill>
-                <a:latin typeface="Courier"/>
-              </a:rPr>
-              <a:t>latitude))    </a:t>
-            </a:r>
-            <a:r>
-              <a:rPr>
-                <a:solidFill>
-                  <a:srgbClr val="5E5E5E"/>
-                </a:solidFill>
-                <a:latin typeface="Courier"/>
-              </a:rPr>
-              <a:t># how many got coordinates</a:t>
+              <a:t># events we can't attribute</a:t>
             </a:r>
           </a:p>
           <a:p>
@@ -3905,7 +3906,7 @@
               <a:rPr>
                 <a:latin typeface="Courier"/>
               </a:rPr>
-              <a:t>[1] 4056</a:t>
+              <a:t>[1] 3</a:t>
             </a:r>
           </a:p>
         </p:txBody>
@@ -3930,7 +3931,7 @@
               <a:rPr>
                 <a:latin typeface="Courier"/>
               </a:rPr>
-              <a:t>by = c("REPORT_NUMBER" = "number")</a:t>
+              <a:t>by = c("animal_id" = "fisher_id")</a:t>
             </a:r>
             <a:r>
               <a:rPr/>
@@ -3940,7 +3941,7 @@
               <a:rPr>
                 <a:latin typeface="Courier"/>
               </a:rPr>
-              <a:t>REPORT_NUMBER</a:t>
+              <a:t>animal_id</a:t>
             </a:r>
             <a:r>
               <a:rPr/>
@@ -3950,7 +3951,7 @@
               <a:rPr>
                 <a:latin typeface="Courier"/>
               </a:rPr>
-              <a:t>number</a:t>
+              <a:t>fisher_id</a:t>
             </a:r>
             <a:r>
               <a:rPr/>
@@ -3971,14 +3972,14 @@
             </a:r>
             <a:r>
               <a:rPr/>
-              <a:t> (all reports)</a:t>
+              <a:t> (all capture events)</a:t>
             </a:r>
           </a:p>
           <a:p>
             <a:pPr lvl="0"/>
             <a:r>
               <a:rPr/>
-              <a:t>Reports with no location get </a:t>
+              <a:t>Unmarked-animal events get </a:t>
             </a:r>
             <a:r>
               <a:rPr>
@@ -3988,7 +3989,7 @@
             </a:r>
             <a:r>
               <a:rPr/>
-              <a:t> coordinates — they simply weren’t geocoded</a:t>
+              <a:t> for sex, age, source</a:t>
             </a:r>
           </a:p>
           <a:p>
@@ -4095,13 +4096,13 @@
             </a:r>
             <a:r>
               <a:rPr/>
-              <a:t> — and both tables happen to have an </a:t>
+              <a:t> — and both tables have a </a:t>
             </a:r>
             <a:r>
               <a:rPr b="1">
                 <a:latin typeface="Courier"/>
               </a:rPr>
-              <a:t>index</a:t>
+              <a:t>site</a:t>
             </a:r>
             <a:r>
               <a:rPr/>
@@ -4119,7 +4120,7 @@
                 </a:solidFill>
                 <a:latin typeface="Courier"/>
               </a:rPr>
-              <a:t>reports_df </a:t>
+              <a:t>captures_df </a:t>
             </a:r>
             <a:r>
               <a:rPr>
@@ -4155,7 +4156,7 @@
                 </a:solidFill>
                 <a:latin typeface="Courier"/>
               </a:rPr>
-              <a:t>(locations_df)</a:t>
+              <a:t>(individuals_df)</a:t>
             </a:r>
             <a:br/>
             <a:r>
@@ -4165,7 +4166,7 @@
                 </a:solidFill>
                 <a:latin typeface="Courier"/>
               </a:rPr>
-              <a:t>#&gt; Joining with `by = join_by(index)`</a:t>
+              <a:t>#&gt; Joining with `by = join_by(site)`</a:t>
             </a:r>
           </a:p>
           <a:p>
@@ -4174,33 +4175,45 @@
             </a:pPr>
             <a:r>
               <a:rPr/>
-              <a:t>That matches </a:t>
+              <a:t>But </a:t>
+            </a:r>
+            <a:r>
+              <a:rPr>
+                <a:latin typeface="Courier"/>
+              </a:rPr>
+              <a:t>site</a:t>
+            </a:r>
+            <a:r>
+              <a:rPr/>
+              <a:t> means different things: the </a:t>
             </a:r>
             <a:r>
               <a:rPr b="1"/>
-              <a:t>row 1 to row 1, row 2 to row 2</a:t>
-            </a:r>
-            <a:r>
-              <a:rPr/>
-              <a:t> — nonsense! </a:t>
-            </a:r>
-            <a:r>
-              <a:rPr>
-                <a:latin typeface="Courier"/>
-              </a:rPr>
-              <a:t>index</a:t>
-            </a:r>
-            <a:r>
-              <a:rPr/>
-              <a:t> is just a row number, not a report ID. You get coordinates glued to the wrong reports, with </a:t>
+              <a:t>capture</a:t>
+            </a:r>
+            <a:r>
+              <a:rPr/>
+              <a:t> site vs the </a:t>
             </a:r>
             <a:r>
               <a:rPr b="1"/>
-              <a:t>no error</a:t>
-            </a:r>
-            <a:r>
-              <a:rPr/>
-              <a:t>.</a:t>
+              <a:t>release</a:t>
+            </a:r>
+            <a:r>
+              <a:rPr/>
+              <a:t> site. Joining on it matches a capture to </a:t>
+            </a:r>
+            <a:r>
+              <a:rPr i="1"/>
+              <a:t>every fisher released at that site</a:t>
+            </a:r>
+            <a:r>
+              <a:rPr/>
+              <a:t> — the row count explodes and the animal ids are nonsense. </a:t>
+            </a:r>
+            <a:r>
+              <a:rPr b="1"/>
+              <a:t>No error.</a:t>
             </a:r>
           </a:p>
           <a:p>
@@ -4223,7 +4236,7 @@
                 </a:solidFill>
                 <a:latin typeface="Courier"/>
               </a:rPr>
-              <a:t>reports_df </a:t>
+              <a:t>captures_df </a:t>
             </a:r>
             <a:r>
               <a:rPr>
@@ -4259,7 +4272,7 @@
                 </a:solidFill>
                 <a:latin typeface="Courier"/>
               </a:rPr>
-              <a:t>(locations_df, </a:t>
+              <a:t>(individuals_df, </a:t>
             </a:r>
             <a:r>
               <a:rPr>
@@ -4304,7 +4317,7 @@
                 </a:solidFill>
                 <a:latin typeface="Courier"/>
               </a:rPr>
-              <a:t>"REPORT_NUMBER"</a:t>
+              <a:t>"animal_id"</a:t>
             </a:r>
             <a:r>
               <a:rPr>
@@ -4322,7 +4335,7 @@
                 </a:solidFill>
                 <a:latin typeface="Courier"/>
               </a:rPr>
-              <a:t>"number"</a:t>
+              <a:t>"fisher_id"</a:t>
             </a:r>
             <a:r>
               <a:rPr>
@@ -4374,13 +4387,13 @@
             </a:pPr>
             <a:r>
               <a:rPr sz="2000"/>
-              <a:t>Nothing here throws an error, so nothing forces you to notice — </a:t>
+              <a:t>Nothing throws an error, so nothing forces you to notice. </a:t>
             </a:r>
             <a:r>
               <a:rPr sz="2000">
                 <a:latin typeface="Courier"/>
               </a:rPr>
-              <a:t>reports_df</a:t>
+              <a:t>captures_df</a:t>
             </a:r>
             <a:r>
               <a:rPr sz="2000"/>
@@ -4390,21 +4403,21 @@
               <a:rPr sz="2000">
                 <a:latin typeface="Courier"/>
               </a:rPr>
-              <a:t>locations_df</a:t>
+              <a:t>individuals_df</a:t>
             </a:r>
             <a:r>
               <a:rPr sz="2000"/>
-              <a:t> both got the same made-up </a:t>
+              <a:t> both have a </a:t>
             </a:r>
             <a:r>
               <a:rPr sz="2000">
                 <a:latin typeface="Courier"/>
               </a:rPr>
-              <a:t>index</a:t>
+              <a:t>site</a:t>
             </a:r>
             <a:r>
               <a:rPr sz="2000"/>
-              <a:t> column at some point, dplyr matches on it happily, and you end up with row 1’s coordinates glued to row 1’s report regardless of which Bigfoot sighting it actually was. If the message </a:t>
+              <a:t> column; dplyr matches on it happily and hands you hundreds of rows that pair a capture with the wrong animal. If the message </a:t>
             </a:r>
             <a:r>
               <a:rPr sz="2000" i="1"/>
@@ -4509,7 +4522,7 @@
             <a:pPr lvl="0"/>
             <a:r>
               <a:rPr/>
-              <a:t>Explain a key and why it must be unique and same-type</a:t>
+              <a:t>Explain a key and why it must be unique (in the lookup table) and same case/type</a:t>
             </a:r>
           </a:p>
           <a:p>
@@ -4845,35 +4858,45 @@
             </a:r>
             <a:r>
               <a:rPr sz="2000"/>
-              <a:t> Which will have </a:t>
+              <a:t> Rank by row count: </a:t>
+            </a:r>
+            <a:r>
+              <a:rPr sz="2000">
+                <a:latin typeface="Courier"/>
+              </a:rPr>
+              <a:t>inner_join</a:t>
+            </a:r>
+            <a:r>
+              <a:rPr sz="2000"/>
+              <a:t> (only matches), </a:t>
+            </a:r>
+            <a:r>
+              <a:rPr sz="2000">
+                <a:latin typeface="Courier"/>
+              </a:rPr>
+              <a:t>left_join</a:t>
+            </a:r>
+            <a:r>
+              <a:rPr sz="2000"/>
+              <a:t> (all captures), </a:t>
+            </a:r>
+            <a:r>
+              <a:rPr sz="2000">
+                <a:latin typeface="Courier"/>
+              </a:rPr>
+              <a:t>full_join</a:t>
+            </a:r>
+            <a:r>
+              <a:rPr sz="2000"/>
+              <a:t> (all captures </a:t>
             </a:r>
             <a:r>
               <a:rPr sz="2000" b="1"/>
-              <a:t>more</a:t>
+              <a:t>and</a:t>
             </a:r>
             <a:r>
               <a:rPr sz="2000"/>
-              <a:t> rows — an </a:t>
-            </a:r>
-            <a:r>
-              <a:rPr sz="2000">
-                <a:latin typeface="Courier"/>
-              </a:rPr>
-              <a:t>inner_join</a:t>
-            </a:r>
-            <a:r>
-              <a:rPr sz="2000"/>
-              <a:t> (only matches) or a </a:t>
-            </a:r>
-            <a:r>
-              <a:rPr sz="2000">
-                <a:latin typeface="Courier"/>
-              </a:rPr>
-              <a:t>left_join</a:t>
-            </a:r>
-            <a:r>
-              <a:rPr sz="2000"/>
-              <a:t> (all reports)? By roughly how many?</a:t>
+              <a:t> every released fisher, even the never-recaptured ones).</a:t>
             </a:r>
           </a:p>
         </p:txBody>
@@ -4935,7 +4958,7 @@
                 </a:solidFill>
                 <a:latin typeface="Courier"/>
               </a:rPr>
-              <a:t>inner &lt;- </a:t>
+              <a:t>key &lt;- </a:t>
             </a:r>
             <a:r>
               <a:rPr>
@@ -4944,42 +4967,6 @@
                 </a:solidFill>
                 <a:latin typeface="Courier"/>
               </a:rPr>
-              <a:t>inner_join</a:t>
-            </a:r>
-            <a:r>
-              <a:rPr>
-                <a:solidFill>
-                  <a:srgbClr val="003B4F"/>
-                </a:solidFill>
-                <a:latin typeface="Courier"/>
-              </a:rPr>
-              <a:t>(reports_df, locations_df, </a:t>
-            </a:r>
-            <a:r>
-              <a:rPr>
-                <a:solidFill>
-                  <a:srgbClr val="657422"/>
-                </a:solidFill>
-                <a:latin typeface="Courier"/>
-              </a:rPr>
-              <a:t>by =</a:t>
-            </a:r>
-            <a:r>
-              <a:rPr>
-                <a:solidFill>
-                  <a:srgbClr val="003B4F"/>
-                </a:solidFill>
-                <a:latin typeface="Courier"/>
-              </a:rPr>
-              <a:t> </a:t>
-            </a:r>
-            <a:r>
-              <a:rPr>
-                <a:solidFill>
-                  <a:srgbClr val="4758AB"/>
-                </a:solidFill>
-                <a:latin typeface="Courier"/>
-              </a:rPr>
               <a:t>c</a:t>
             </a:r>
             <a:r>
@@ -4998,7 +4985,7 @@
                 </a:solidFill>
                 <a:latin typeface="Courier"/>
               </a:rPr>
-              <a:t>"REPORT_NUMBER"</a:t>
+              <a:t>"animal_id"</a:t>
             </a:r>
             <a:r>
               <a:rPr>
@@ -5016,226 +5003,165 @@
                 </a:solidFill>
                 <a:latin typeface="Courier"/>
               </a:rPr>
-              <a:t>"number"</a:t>
-            </a:r>
-            <a:r>
-              <a:rPr>
-                <a:solidFill>
-                  <a:srgbClr val="003B4F"/>
-                </a:solidFill>
-                <a:latin typeface="Courier"/>
-              </a:rPr>
-              <a:t>))</a:t>
-            </a:r>
-            <a:br/>
-            <a:r>
-              <a:rPr>
-                <a:solidFill>
-                  <a:srgbClr val="003B4F"/>
-                </a:solidFill>
-                <a:latin typeface="Courier"/>
-              </a:rPr>
-              <a:t>left  &lt;- </a:t>
-            </a:r>
-            <a:r>
-              <a:rPr>
-                <a:solidFill>
-                  <a:srgbClr val="4758AB"/>
-                </a:solidFill>
-                <a:latin typeface="Courier"/>
-              </a:rPr>
-              <a:t>left_join</a:t>
-            </a:r>
-            <a:r>
-              <a:rPr>
-                <a:solidFill>
-                  <a:srgbClr val="003B4F"/>
-                </a:solidFill>
-                <a:latin typeface="Courier"/>
-              </a:rPr>
-              <a:t> (reports_df, locations_df, </a:t>
-            </a:r>
-            <a:r>
-              <a:rPr>
-                <a:solidFill>
-                  <a:srgbClr val="657422"/>
-                </a:solidFill>
-                <a:latin typeface="Courier"/>
-              </a:rPr>
-              <a:t>by =</a:t>
-            </a:r>
-            <a:r>
-              <a:rPr>
-                <a:solidFill>
-                  <a:srgbClr val="003B4F"/>
-                </a:solidFill>
-                <a:latin typeface="Courier"/>
-              </a:rPr>
-              <a:t> </a:t>
-            </a:r>
-            <a:r>
-              <a:rPr>
-                <a:solidFill>
-                  <a:srgbClr val="4758AB"/>
-                </a:solidFill>
-                <a:latin typeface="Courier"/>
-              </a:rPr>
-              <a:t>c</a:t>
-            </a:r>
-            <a:r>
-              <a:rPr>
-                <a:solidFill>
-                  <a:srgbClr val="003B4F"/>
-                </a:solidFill>
-                <a:latin typeface="Courier"/>
-              </a:rPr>
-              <a:t>(</a:t>
-            </a:r>
-            <a:r>
-              <a:rPr>
-                <a:solidFill>
-                  <a:srgbClr val="20794D"/>
-                </a:solidFill>
-                <a:latin typeface="Courier"/>
-              </a:rPr>
-              <a:t>"REPORT_NUMBER"</a:t>
-            </a:r>
-            <a:r>
-              <a:rPr>
-                <a:solidFill>
-                  <a:srgbClr val="003B4F"/>
-                </a:solidFill>
-                <a:latin typeface="Courier"/>
-              </a:rPr>
-              <a:t> = </a:t>
-            </a:r>
-            <a:r>
-              <a:rPr>
-                <a:solidFill>
-                  <a:srgbClr val="20794D"/>
-                </a:solidFill>
-                <a:latin typeface="Courier"/>
-              </a:rPr>
-              <a:t>"number"</a:t>
-            </a:r>
-            <a:r>
-              <a:rPr>
-                <a:solidFill>
-                  <a:srgbClr val="003B4F"/>
-                </a:solidFill>
-                <a:latin typeface="Courier"/>
-              </a:rPr>
-              <a:t>))</a:t>
-            </a:r>
-            <a:br/>
-            <a:r>
-              <a:rPr>
-                <a:solidFill>
-                  <a:srgbClr val="003B4F"/>
-                </a:solidFill>
-                <a:latin typeface="Courier"/>
-              </a:rPr>
-              <a:t>full  &lt;- </a:t>
-            </a:r>
-            <a:r>
-              <a:rPr>
-                <a:solidFill>
-                  <a:srgbClr val="4758AB"/>
-                </a:solidFill>
-                <a:latin typeface="Courier"/>
-              </a:rPr>
-              <a:t>full_join</a:t>
-            </a:r>
-            <a:r>
-              <a:rPr>
-                <a:solidFill>
-                  <a:srgbClr val="003B4F"/>
-                </a:solidFill>
-                <a:latin typeface="Courier"/>
-              </a:rPr>
-              <a:t> (reports_df, locations_df, </a:t>
-            </a:r>
-            <a:r>
-              <a:rPr>
-                <a:solidFill>
-                  <a:srgbClr val="657422"/>
-                </a:solidFill>
-                <a:latin typeface="Courier"/>
-              </a:rPr>
-              <a:t>by =</a:t>
-            </a:r>
-            <a:r>
-              <a:rPr>
-                <a:solidFill>
-                  <a:srgbClr val="003B4F"/>
-                </a:solidFill>
-                <a:latin typeface="Courier"/>
-              </a:rPr>
-              <a:t> </a:t>
-            </a:r>
-            <a:r>
-              <a:rPr>
-                <a:solidFill>
-                  <a:srgbClr val="4758AB"/>
-                </a:solidFill>
-                <a:latin typeface="Courier"/>
-              </a:rPr>
-              <a:t>c</a:t>
-            </a:r>
-            <a:r>
-              <a:rPr>
-                <a:solidFill>
-                  <a:srgbClr val="003B4F"/>
-                </a:solidFill>
-                <a:latin typeface="Courier"/>
-              </a:rPr>
-              <a:t>(</a:t>
-            </a:r>
-            <a:r>
-              <a:rPr>
-                <a:solidFill>
-                  <a:srgbClr val="20794D"/>
-                </a:solidFill>
-                <a:latin typeface="Courier"/>
-              </a:rPr>
-              <a:t>"REPORT_NUMBER"</a:t>
-            </a:r>
-            <a:r>
-              <a:rPr>
-                <a:solidFill>
-                  <a:srgbClr val="003B4F"/>
-                </a:solidFill>
-                <a:latin typeface="Courier"/>
-              </a:rPr>
-              <a:t> = </a:t>
-            </a:r>
-            <a:r>
-              <a:rPr>
-                <a:solidFill>
-                  <a:srgbClr val="20794D"/>
-                </a:solidFill>
-                <a:latin typeface="Courier"/>
-              </a:rPr>
-              <a:t>"number"</a:t>
-            </a:r>
-            <a:r>
-              <a:rPr>
-                <a:solidFill>
-                  <a:srgbClr val="003B4F"/>
-                </a:solidFill>
-                <a:latin typeface="Courier"/>
-              </a:rPr>
-              <a:t>))</a:t>
+              <a:t>"fisher_id"</a:t>
+            </a:r>
+            <a:r>
+              <a:rPr>
+                <a:solidFill>
+                  <a:srgbClr val="003B4F"/>
+                </a:solidFill>
+                <a:latin typeface="Courier"/>
+              </a:rPr>
+              <a:t>)</a:t>
             </a:r>
             <a:br/>
             <a:br/>
             <a:r>
               <a:rPr>
                 <a:solidFill>
+                  <a:srgbClr val="003B4F"/>
+                </a:solidFill>
+                <a:latin typeface="Courier"/>
+              </a:rPr>
+              <a:t>inner &lt;- </a:t>
+            </a:r>
+            <a:r>
+              <a:rPr>
+                <a:solidFill>
                   <a:srgbClr val="4758AB"/>
                 </a:solidFill>
                 <a:latin typeface="Courier"/>
               </a:rPr>
+              <a:t>inner_join</a:t>
+            </a:r>
+            <a:r>
+              <a:rPr>
+                <a:solidFill>
+                  <a:srgbClr val="003B4F"/>
+                </a:solidFill>
+                <a:latin typeface="Courier"/>
+              </a:rPr>
+              <a:t>(captures_df, individuals_df, </a:t>
+            </a:r>
+            <a:r>
+              <a:rPr>
+                <a:solidFill>
+                  <a:srgbClr val="657422"/>
+                </a:solidFill>
+                <a:latin typeface="Courier"/>
+              </a:rPr>
+              <a:t>by =</a:t>
+            </a:r>
+            <a:r>
+              <a:rPr>
+                <a:solidFill>
+                  <a:srgbClr val="003B4F"/>
+                </a:solidFill>
+                <a:latin typeface="Courier"/>
+              </a:rPr>
+              <a:t> key)</a:t>
+            </a:r>
+            <a:br/>
+            <a:r>
+              <a:rPr>
+                <a:solidFill>
+                  <a:srgbClr val="003B4F"/>
+                </a:solidFill>
+                <a:latin typeface="Courier"/>
+              </a:rPr>
+              <a:t>left  &lt;- </a:t>
+            </a:r>
+            <a:r>
+              <a:rPr>
+                <a:solidFill>
+                  <a:srgbClr val="4758AB"/>
+                </a:solidFill>
+                <a:latin typeface="Courier"/>
+              </a:rPr>
+              <a:t>left_join</a:t>
+            </a:r>
+            <a:r>
+              <a:rPr>
+                <a:solidFill>
+                  <a:srgbClr val="003B4F"/>
+                </a:solidFill>
+                <a:latin typeface="Courier"/>
+              </a:rPr>
+              <a:t> (captures_df, individuals_df, </a:t>
+            </a:r>
+            <a:r>
+              <a:rPr>
+                <a:solidFill>
+                  <a:srgbClr val="657422"/>
+                </a:solidFill>
+                <a:latin typeface="Courier"/>
+              </a:rPr>
+              <a:t>by =</a:t>
+            </a:r>
+            <a:r>
+              <a:rPr>
+                <a:solidFill>
+                  <a:srgbClr val="003B4F"/>
+                </a:solidFill>
+                <a:latin typeface="Courier"/>
+              </a:rPr>
+              <a:t> key)</a:t>
+            </a:r>
+            <a:br/>
+            <a:r>
+              <a:rPr>
+                <a:solidFill>
+                  <a:srgbClr val="003B4F"/>
+                </a:solidFill>
+                <a:latin typeface="Courier"/>
+              </a:rPr>
+              <a:t>full  &lt;- </a:t>
+            </a:r>
+            <a:r>
+              <a:rPr>
+                <a:solidFill>
+                  <a:srgbClr val="4758AB"/>
+                </a:solidFill>
+                <a:latin typeface="Courier"/>
+              </a:rPr>
+              <a:t>full_join</a:t>
+            </a:r>
+            <a:r>
+              <a:rPr>
+                <a:solidFill>
+                  <a:srgbClr val="003B4F"/>
+                </a:solidFill>
+                <a:latin typeface="Courier"/>
+              </a:rPr>
+              <a:t> (captures_df, individuals_df, </a:t>
+            </a:r>
+            <a:r>
+              <a:rPr>
+                <a:solidFill>
+                  <a:srgbClr val="657422"/>
+                </a:solidFill>
+                <a:latin typeface="Courier"/>
+              </a:rPr>
+              <a:t>by =</a:t>
+            </a:r>
+            <a:r>
+              <a:rPr>
+                <a:solidFill>
+                  <a:srgbClr val="003B4F"/>
+                </a:solidFill>
+                <a:latin typeface="Courier"/>
+              </a:rPr>
+              <a:t> key)</a:t>
+            </a:r>
+            <a:br/>
+            <a:br/>
+            <a:r>
+              <a:rPr>
+                <a:solidFill>
+                  <a:srgbClr val="4758AB"/>
+                </a:solidFill>
+                <a:latin typeface="Courier"/>
+              </a:rPr>
               <a:t>c</a:t>
             </a:r>
             <a:r>
@@ -5365,7 +5291,7 @@
                 <a:latin typeface="Courier"/>
               </a:rPr>
               <a:t>inner  left  full 
- 4056  5022  5216 </a:t>
+   42    45    49 </a:t>
             </a:r>
           </a:p>
         </p:txBody>
@@ -5456,15 +5382,15 @@
                       </a:pPr>
                       <a:r>
                         <a:rPr/>
-                        <a:t>only rows that </a:t>
+                        <a:t>only events with a </a:t>
                       </a:r>
                       <a:r>
                         <a:rPr b="1"/>
-                        <a:t>match</a:t>
+                        <a:t>known</a:t>
                       </a:r>
                       <a:r>
                         <a:rPr/>
-                        <a:t> in both</a:t>
+                        <a:t> animal</a:t>
                       </a:r>
                     </a:p>
                   </a:txBody>
@@ -5502,7 +5428,7 @@
                       </a:r>
                       <a:r>
                         <a:rPr/>
-                        <a:t> rows from the left (reports)</a:t>
+                        <a:t> capture events</a:t>
                       </a:r>
                     </a:p>
                   </a:txBody>
@@ -5535,20 +5461,16 @@
                         <a:buNone/>
                       </a:pPr>
                       <a:r>
+                        <a:rPr/>
+                        <a:t>all events </a:t>
+                      </a:r>
+                      <a:r>
                         <a:rPr b="1"/>
-                        <a:t>all</a:t>
+                        <a:t>and</a:t>
                       </a:r>
                       <a:r>
                         <a:rPr/>
-                        <a:t> rows from </a:t>
-                      </a:r>
-                      <a:r>
-                        <a:rPr b="1"/>
-                        <a:t>both</a:t>
-                      </a:r>
-                      <a:r>
-                        <a:rPr/>
-                        <a:t> tables</a:t>
+                        <a:t> every released fisher</a:t>
                       </a:r>
                     </a:p>
                   </a:txBody>
@@ -5641,7 +5563,7 @@
             </a:r>
             <a:r>
               <a:rPr i="1"/>
-              <a:t>(Use this for the map: keep all reports.)</a:t>
+              <a:t>(Event-level analysis: keep all captures.)</a:t>
             </a:r>
           </a:p>
           <a:p>
@@ -5658,7 +5580,7 @@
             </a:r>
             <a:r>
               <a:rPr i="1"/>
-              <a:t>(Use when missing data would ruin the analysis.)</a:t>
+              <a:t>(When an unattributed event would ruin the analysis.)</a:t>
             </a:r>
           </a:p>
           <a:p>
@@ -5675,7 +5597,7 @@
             </a:r>
             <a:r>
               <a:rPr i="1"/>
-              <a:t>(Use to audit what’s missing on each side.)</a:t>
+              <a:t>(To audit what’s missing on each side — which fishers vanished.)</a:t>
             </a:r>
           </a:p>
         </p:txBody>
@@ -5718,27 +5640,15 @@
             </a:pPr>
             <a:r>
               <a:rPr sz="2000"/>
-              <a:t>Ask which rows you’d be upset to lose. Drop a report from the map and a real sighting vanishes; drop a stray location record and nothing is lost. That’s why the map keeps every report — </a:t>
-            </a:r>
-            <a:r>
-              <a:rPr sz="2000">
-                <a:latin typeface="Courier"/>
-              </a:rPr>
-              <a:t>left_join</a:t>
+              <a:t>Ask which rows you’d be upset to lose. Drop an unmarked capture and you undercount effort; drop a never-recaptured fisher from a </a:t>
+            </a:r>
+            <a:r>
+              <a:rPr sz="2000" i="1"/>
+              <a:t>survival</a:t>
             </a:r>
             <a:r>
               <a:rPr sz="2000"/>
-              <a:t>, not </a:t>
-            </a:r>
-            <a:r>
-              <a:rPr sz="2000">
-                <a:latin typeface="Courier"/>
-              </a:rPr>
-              <a:t>inner_join</a:t>
-            </a:r>
-            <a:r>
-              <a:rPr sz="2000"/>
-              <a:t>.</a:t>
+              <a:t> analysis and you bias it badly. Match the join to the question.</a:t>
             </a:r>
           </a:p>
           <a:p>
@@ -5876,7 +5786,7 @@
             </a:pPr>
             <a:r>
               <a:rPr/>
-              <a:t>Where we left off — Factors</a:t>
+              <a:t>Where we left off</a:t>
             </a:r>
           </a:p>
         </p:txBody>
@@ -5897,20 +5807,44 @@
           <a:lstStyle/>
           <a:p>
             <a:pPr lvl="0"/>
+            <a:r>
+              <a:rPr b="1"/>
+              <a:t>Pivoting</a:t>
+            </a:r>
+            <a:r>
+              <a:rPr/>
+              <a:t> — reshaped wide data to long; </a:t>
+            </a:r>
+            <a:r>
+              <a:rPr b="1"/>
+              <a:t>ANOVA</a:t>
+            </a:r>
+            <a:r>
+              <a:rPr/>
+              <a:t> — compared group means; </a:t>
+            </a:r>
             <a:r>
               <a:rPr b="1"/>
               <a:t>Factors</a:t>
             </a:r>
             <a:r>
               <a:rPr/>
-              <a:t> — reordered and relabeled categorical levels for clean plots and models</a:t>
+              <a:t> — controlled category order</a:t>
             </a:r>
           </a:p>
           <a:p>
             <a:pPr lvl="0"/>
             <a:r>
               <a:rPr/>
-              <a:t>Before that: reshaped messy data (Pivoting), started the final project, and ran a one-way ANOVA</a:t>
+              <a:t>Your </a:t>
+            </a:r>
+            <a:r>
+              <a:rPr b="1"/>
+              <a:t>final project</a:t>
+            </a:r>
+            <a:r>
+              <a:rPr/>
+              <a:t> is under way — data found, question pitched</a:t>
             </a:r>
           </a:p>
           <a:p>
@@ -5952,31 +5886,31 @@
             </a:pPr>
             <a:r>
               <a:rPr sz="2000"/>
-              <a:t>Real data almost never lives in a single table. Today’s dataset comes in </a:t>
+              <a:t>Real data almost never lives in a single table. Fishers (</a:t>
+            </a:r>
+            <a:r>
+              <a:rPr sz="2000" i="1"/>
+              <a:t>Pekania pennanti</a:t>
+            </a:r>
+            <a:r>
+              <a:rPr sz="2000"/>
+              <a:t>, a large forest weasel) are reintroduced and then monitored: one table lists the </a:t>
             </a:r>
             <a:r>
               <a:rPr sz="2000" b="1"/>
-              <a:t>two</a:t>
+              <a:t>animals released</a:t>
             </a:r>
             <a:r>
               <a:rPr sz="2000"/>
-              <a:t>: one file has the Bigfoot report </a:t>
+              <a:t>, another logs every </a:t>
             </a:r>
             <a:r>
               <a:rPr sz="2000" b="1"/>
-              <a:t>text</a:t>
+              <a:t>field capture / collar event</a:t>
             </a:r>
             <a:r>
               <a:rPr sz="2000"/>
-              <a:t> (where, when, what), a second has the </a:t>
-            </a:r>
-            <a:r>
-              <a:rPr sz="2000" b="1"/>
-              <a:t>coordinates</a:t>
-            </a:r>
-            <a:r>
-              <a:rPr sz="2000"/>
-              <a:t>. Neither alone lets you map a sighting. </a:t>
+              <a:t>. Neither alone tells you a captured animal’s sex or where it came from. </a:t>
             </a:r>
             <a:r>
               <a:rPr sz="2000" b="1"/>
@@ -5984,7 +5918,7 @@
             </a:r>
             <a:r>
               <a:rPr sz="2000"/>
-              <a:t> stitch them together on a shared </a:t>
+              <a:t> stitch them on a shared </a:t>
             </a:r>
             <a:r>
               <a:rPr sz="2000" b="1"/>
@@ -5992,7 +5926,11 @@
             </a:r>
             <a:r>
               <a:rPr sz="2000"/>
-              <a:t> — and the result is exactly the file we’ll map next week. 🦶</a:t>
+              <a:t>. </a:t>
+            </a:r>
+            <a:r>
+              <a:rPr sz="2000" i="1"/>
+              <a:t>(The data are simulated for teaching, patterned on real reintroduction programs.)</a:t>
             </a:r>
           </a:p>
         </p:txBody>
@@ -6219,19 +6157,27 @@
             </a:pPr>
             <a:r>
               <a:rPr sz="2000" b="1"/>
-              <a:t>🔮 Predict first:</a:t>
+              <a:t>🔮 Predict first (two ways):</a:t>
             </a:r>
             <a:r>
               <a:rPr sz="2000"/>
-              <a:t> How many reports have </a:t>
+              <a:t> how many capture </a:t>
             </a:r>
             <a:r>
               <a:rPr sz="2000" b="1"/>
-              <a:t>no</a:t>
+              <a:t>events</a:t>
             </a:r>
             <a:r>
               <a:rPr sz="2000"/>
-              <a:t> coordinates? (Hint: total reports minus the number that got a latitude in Chunk 2.)</a:t>
+              <a:t> have no known animal? How many released </a:t>
+            </a:r>
+            <a:r>
+              <a:rPr sz="2000" b="1"/>
+              <a:t>fishers</a:t>
+            </a:r>
+            <a:r>
+              <a:rPr sz="2000"/>
+              <a:t> were never recaptured?</a:t>
             </a:r>
           </a:p>
         </p:txBody>
@@ -6283,7 +6229,7 @@
                 </a:solidFill>
                 <a:latin typeface="Courier"/>
               </a:rPr>
-              <a:t># Reports that have NO location ----------------------</a:t>
+              <a:t># (a) capture events of unmarked animals</a:t>
             </a:r>
             <a:br/>
             <a:r>
@@ -6293,7 +6239,7 @@
                 </a:solidFill>
                 <a:latin typeface="Courier"/>
               </a:rPr>
-              <a:t>missing_coords &lt;- reports_df </a:t>
+              <a:t>captures_df </a:t>
             </a:r>
             <a:r>
               <a:rPr>
@@ -6330,7 +6276,7 @@
                 </a:solidFill>
                 <a:latin typeface="Courier"/>
               </a:rPr>
-              <a:t>(locations_df, </a:t>
+              <a:t>(individuals_df, </a:t>
             </a:r>
             <a:r>
               <a:rPr>
@@ -6375,7 +6321,7 @@
                 </a:solidFill>
                 <a:latin typeface="Courier"/>
               </a:rPr>
-              <a:t>"REPORT_NUMBER"</a:t>
+              <a:t>"animal_id"</a:t>
             </a:r>
             <a:r>
               <a:rPr>
@@ -6393,36 +6339,234 @@
                 </a:solidFill>
                 <a:latin typeface="Courier"/>
               </a:rPr>
-              <a:t>"number"</a:t>
-            </a:r>
-            <a:r>
-              <a:rPr>
-                <a:solidFill>
-                  <a:srgbClr val="003B4F"/>
-                </a:solidFill>
-                <a:latin typeface="Courier"/>
-              </a:rPr>
-              <a:t>))</a:t>
+              <a:t>"fisher_id"</a:t>
+            </a:r>
+            <a:r>
+              <a:rPr>
+                <a:solidFill>
+                  <a:srgbClr val="003B4F"/>
+                </a:solidFill>
+                <a:latin typeface="Courier"/>
+              </a:rPr>
+              <a:t>)) </a:t>
+            </a:r>
+            <a:r>
+              <a:rPr>
+                <a:solidFill>
+                  <a:srgbClr val="5E5E5E"/>
+                </a:solidFill>
+                <a:latin typeface="Courier"/>
+              </a:rPr>
+              <a:t>%&gt;%</a:t>
             </a:r>
             <a:br/>
+            <a:r>
+              <a:rPr>
+                <a:solidFill>
+                  <a:srgbClr val="003B4F"/>
+                </a:solidFill>
+                <a:latin typeface="Courier"/>
+              </a:rPr>
+              <a:t>  </a:t>
+            </a:r>
+            <a:r>
+              <a:rPr>
+                <a:solidFill>
+                  <a:srgbClr val="4758AB"/>
+                </a:solidFill>
+                <a:latin typeface="Courier"/>
+              </a:rPr>
+              <a:t>nrow</a:t>
+            </a:r>
+            <a:r>
+              <a:rPr>
+                <a:solidFill>
+                  <a:srgbClr val="003B4F"/>
+                </a:solidFill>
+                <a:latin typeface="Courier"/>
+              </a:rPr>
+              <a:t>()</a:t>
+            </a:r>
+          </a:p>
+          <a:p>
+            <a:pPr lvl="0" indent="0">
+              <a:buNone/>
+            </a:pPr>
+            <a:r>
+              <a:rPr>
+                <a:latin typeface="Courier"/>
+              </a:rPr>
+              <a:t>[1] 3</a:t>
+            </a:r>
+          </a:p>
+          <a:p>
+            <a:pPr lvl="0" indent="0">
+              <a:buNone/>
+            </a:pPr>
+            <a:r>
+              <a:rPr>
+                <a:solidFill>
+                  <a:srgbClr val="5E5E5E"/>
+                </a:solidFill>
+                <a:latin typeface="Courier"/>
+              </a:rPr>
+              <a:t># (b) released fishers with no capture — anti_join the OTHER way</a:t>
+            </a:r>
             <a:br/>
             <a:r>
               <a:rPr>
                 <a:solidFill>
+                  <a:srgbClr val="003B4F"/>
+                </a:solidFill>
+                <a:latin typeface="Courier"/>
+              </a:rPr>
+              <a:t>individuals_df </a:t>
+            </a:r>
+            <a:r>
+              <a:rPr>
+                <a:solidFill>
+                  <a:srgbClr val="5E5E5E"/>
+                </a:solidFill>
+                <a:latin typeface="Courier"/>
+              </a:rPr>
+              <a:t>%&gt;%</a:t>
+            </a:r>
+            <a:br/>
+            <a:r>
+              <a:rPr>
+                <a:solidFill>
+                  <a:srgbClr val="003B4F"/>
+                </a:solidFill>
+                <a:latin typeface="Courier"/>
+              </a:rPr>
+              <a:t>  </a:t>
+            </a:r>
+            <a:r>
+              <a:rPr>
+                <a:solidFill>
                   <a:srgbClr val="4758AB"/>
                 </a:solidFill>
                 <a:latin typeface="Courier"/>
               </a:rPr>
-              <a:t>nrow</a:t>
-            </a:r>
-            <a:r>
-              <a:rPr>
-                <a:solidFill>
-                  <a:srgbClr val="003B4F"/>
-                </a:solidFill>
-                <a:latin typeface="Courier"/>
-              </a:rPr>
-              <a:t>(missing_coords)</a:t>
+              <a:t>anti_join</a:t>
+            </a:r>
+            <a:r>
+              <a:rPr>
+                <a:solidFill>
+                  <a:srgbClr val="003B4F"/>
+                </a:solidFill>
+                <a:latin typeface="Courier"/>
+              </a:rPr>
+              <a:t>(captures_df, </a:t>
+            </a:r>
+            <a:r>
+              <a:rPr>
+                <a:solidFill>
+                  <a:srgbClr val="657422"/>
+                </a:solidFill>
+                <a:latin typeface="Courier"/>
+              </a:rPr>
+              <a:t>by =</a:t>
+            </a:r>
+            <a:r>
+              <a:rPr>
+                <a:solidFill>
+                  <a:srgbClr val="003B4F"/>
+                </a:solidFill>
+                <a:latin typeface="Courier"/>
+              </a:rPr>
+              <a:t> </a:t>
+            </a:r>
+            <a:r>
+              <a:rPr>
+                <a:solidFill>
+                  <a:srgbClr val="4758AB"/>
+                </a:solidFill>
+                <a:latin typeface="Courier"/>
+              </a:rPr>
+              <a:t>c</a:t>
+            </a:r>
+            <a:r>
+              <a:rPr>
+                <a:solidFill>
+                  <a:srgbClr val="003B4F"/>
+                </a:solidFill>
+                <a:latin typeface="Courier"/>
+              </a:rPr>
+              <a:t>(</a:t>
+            </a:r>
+            <a:r>
+              <a:rPr>
+                <a:solidFill>
+                  <a:srgbClr val="20794D"/>
+                </a:solidFill>
+                <a:latin typeface="Courier"/>
+              </a:rPr>
+              <a:t>"fisher_id"</a:t>
+            </a:r>
+            <a:r>
+              <a:rPr>
+                <a:solidFill>
+                  <a:srgbClr val="003B4F"/>
+                </a:solidFill>
+                <a:latin typeface="Courier"/>
+              </a:rPr>
+              <a:t> = </a:t>
+            </a:r>
+            <a:r>
+              <a:rPr>
+                <a:solidFill>
+                  <a:srgbClr val="20794D"/>
+                </a:solidFill>
+                <a:latin typeface="Courier"/>
+              </a:rPr>
+              <a:t>"animal_id"</a:t>
+            </a:r>
+            <a:r>
+              <a:rPr>
+                <a:solidFill>
+                  <a:srgbClr val="003B4F"/>
+                </a:solidFill>
+                <a:latin typeface="Courier"/>
+              </a:rPr>
+              <a:t>)) </a:t>
+            </a:r>
+            <a:r>
+              <a:rPr>
+                <a:solidFill>
+                  <a:srgbClr val="5E5E5E"/>
+                </a:solidFill>
+                <a:latin typeface="Courier"/>
+              </a:rPr>
+              <a:t>%&gt;%</a:t>
+            </a:r>
+            <a:br/>
+            <a:r>
+              <a:rPr>
+                <a:solidFill>
+                  <a:srgbClr val="003B4F"/>
+                </a:solidFill>
+                <a:latin typeface="Courier"/>
+              </a:rPr>
+              <a:t>  </a:t>
+            </a:r>
+            <a:r>
+              <a:rPr>
+                <a:solidFill>
+                  <a:srgbClr val="4758AB"/>
+                </a:solidFill>
+                <a:latin typeface="Courier"/>
+              </a:rPr>
+              <a:t>select</a:t>
+            </a:r>
+            <a:r>
+              <a:rPr>
+                <a:solidFill>
+                  <a:srgbClr val="003B4F"/>
+                </a:solidFill>
+                <a:latin typeface="Courier"/>
+              </a:rPr>
+              <a:t>(fisher_id, sex, site)</a:t>
             </a:r>
           </a:p>
           <a:p>
@@ -6433,164 +6577,13 @@
               <a:rPr>
                 <a:latin typeface="Courier"/>
               </a:rPr>
-              <a:t>[1] 966</a:t>
-            </a:r>
-          </a:p>
-          <a:p>
-            <a:pPr lvl="0" indent="0">
-              <a:buNone/>
-            </a:pPr>
-            <a:r>
-              <a:rPr>
-                <a:solidFill>
-                  <a:srgbClr val="003B4F"/>
-                </a:solidFill>
-                <a:latin typeface="Courier"/>
-              </a:rPr>
-              <a:t>missing_coords </a:t>
-            </a:r>
-            <a:r>
-              <a:rPr>
-                <a:solidFill>
-                  <a:srgbClr val="5E5E5E"/>
-                </a:solidFill>
-                <a:latin typeface="Courier"/>
-              </a:rPr>
-              <a:t>%&gt;%</a:t>
-            </a:r>
-            <a:r>
-              <a:rPr>
-                <a:solidFill>
-                  <a:srgbClr val="003B4F"/>
-                </a:solidFill>
-                <a:latin typeface="Courier"/>
-              </a:rPr>
-              <a:t> </a:t>
-            </a:r>
-            <a:r>
-              <a:rPr>
-                <a:solidFill>
-                  <a:srgbClr val="4758AB"/>
-                </a:solidFill>
-                <a:latin typeface="Courier"/>
-              </a:rPr>
-              <a:t>count</a:t>
-            </a:r>
-            <a:r>
-              <a:rPr>
-                <a:solidFill>
-                  <a:srgbClr val="003B4F"/>
-                </a:solidFill>
-                <a:latin typeface="Courier"/>
-              </a:rPr>
-              <a:t>(STATE, </a:t>
-            </a:r>
-            <a:r>
-              <a:rPr>
-                <a:solidFill>
-                  <a:srgbClr val="657422"/>
-                </a:solidFill>
-                <a:latin typeface="Courier"/>
-              </a:rPr>
-              <a:t>sort =</a:t>
-            </a:r>
-            <a:r>
-              <a:rPr>
-                <a:solidFill>
-                  <a:srgbClr val="003B4F"/>
-                </a:solidFill>
-                <a:latin typeface="Courier"/>
-              </a:rPr>
-              <a:t> </a:t>
-            </a:r>
-            <a:r>
-              <a:rPr>
-                <a:solidFill>
-                  <a:srgbClr val="8F5902"/>
-                </a:solidFill>
-                <a:latin typeface="Courier"/>
-              </a:rPr>
-              <a:t>TRUE</a:t>
-            </a:r>
-            <a:r>
-              <a:rPr>
-                <a:solidFill>
-                  <a:srgbClr val="003B4F"/>
-                </a:solidFill>
-                <a:latin typeface="Courier"/>
-              </a:rPr>
-              <a:t>) </a:t>
-            </a:r>
-            <a:r>
-              <a:rPr>
-                <a:solidFill>
-                  <a:srgbClr val="5E5E5E"/>
-                </a:solidFill>
-                <a:latin typeface="Courier"/>
-              </a:rPr>
-              <a:t>%&gt;%</a:t>
-            </a:r>
-            <a:r>
-              <a:rPr>
-                <a:solidFill>
-                  <a:srgbClr val="003B4F"/>
-                </a:solidFill>
-                <a:latin typeface="Courier"/>
-              </a:rPr>
-              <a:t> </a:t>
-            </a:r>
-            <a:r>
-              <a:rPr>
-                <a:solidFill>
-                  <a:srgbClr val="4758AB"/>
-                </a:solidFill>
-                <a:latin typeface="Courier"/>
-              </a:rPr>
-              <a:t>head</a:t>
-            </a:r>
-            <a:r>
-              <a:rPr>
-                <a:solidFill>
-                  <a:srgbClr val="003B4F"/>
-                </a:solidFill>
-                <a:latin typeface="Courier"/>
-              </a:rPr>
-              <a:t>(</a:t>
-            </a:r>
-            <a:r>
-              <a:rPr>
-                <a:solidFill>
-                  <a:srgbClr val="AD0000"/>
-                </a:solidFill>
-                <a:latin typeface="Courier"/>
-              </a:rPr>
-              <a:t>4</a:t>
-            </a:r>
-            <a:r>
-              <a:rPr>
-                <a:solidFill>
-                  <a:srgbClr val="003B4F"/>
-                </a:solidFill>
-                <a:latin typeface="Courier"/>
-              </a:rPr>
-              <a:t>)</a:t>
-            </a:r>
-          </a:p>
-          <a:p>
-            <a:pPr lvl="0" indent="0">
-              <a:buNone/>
-            </a:pPr>
-            <a:r>
-              <a:rPr>
-                <a:latin typeface="Courier"/>
-              </a:rPr>
-              <a:t># A tibble: 4 × 2
-  STATE            n
-  &lt;chr&gt;        &lt;int&gt;
-1 California     140
-2 Pennsylvania    67
-3 Oregon          63
-4 Washington      61</a:t>
+              <a:t># A tibble: 4 × 3
+  fisher_id sex   site           
+  &lt;chr&gt;     &lt;chr&gt; &lt;chr&gt;          
+1 F04       F     Snoqualmie     
+2 F11       F     Gifford Pinchot
+3 F17       M     Snoqualmie     
+4 F18       F     Mt Rainier     </a:t>
             </a:r>
           </a:p>
         </p:txBody>
@@ -6627,7 +6620,7 @@
             </a:r>
             <a:r>
               <a:rPr/>
-              <a:t> match — perfect for “what’s missing?”</a:t>
+              <a:t> match — “what’s missing?”</a:t>
             </a:r>
           </a:p>
           <a:p>
@@ -6649,7 +6642,7 @@
             <a:pPr lvl="0"/>
             <a:r>
               <a:rPr/>
-              <a:t>Here: the reports we could never map, and where they cluster</a:t>
+              <a:t>Direction matters: run it both ways to see each side’s gaps</a:t>
             </a:r>
           </a:p>
           <a:p>
@@ -6749,7 +6742,7 @@
                 </a:solidFill>
                 <a:latin typeface="Courier"/>
               </a:rPr>
-              <a:t># Keep only reports that DO have a location ----------</a:t>
+              <a:t># Released fishers that WERE recaptured at least once</a:t>
             </a:r>
             <a:br/>
             <a:r>
@@ -6759,7 +6752,7 @@
                 </a:solidFill>
                 <a:latin typeface="Courier"/>
               </a:rPr>
-              <a:t>mappable_reports &lt;- reports_df </a:t>
+              <a:t>individuals_df </a:t>
             </a:r>
             <a:r>
               <a:rPr>
@@ -6796,7 +6789,7 @@
                 </a:solidFill>
                 <a:latin typeface="Courier"/>
               </a:rPr>
-              <a:t>(locations_df, </a:t>
+              <a:t>(captures_df, </a:t>
             </a:r>
             <a:r>
               <a:rPr>
@@ -6841,7 +6834,7 @@
                 </a:solidFill>
                 <a:latin typeface="Courier"/>
               </a:rPr>
-              <a:t>"REPORT_NUMBER"</a:t>
+              <a:t>"fisher_id"</a:t>
             </a:r>
             <a:r>
               <a:rPr>
@@ -6859,19 +6852,36 @@
                 </a:solidFill>
                 <a:latin typeface="Courier"/>
               </a:rPr>
-              <a:t>"number"</a:t>
-            </a:r>
-            <a:r>
-              <a:rPr>
-                <a:solidFill>
-                  <a:srgbClr val="003B4F"/>
-                </a:solidFill>
-                <a:latin typeface="Courier"/>
-              </a:rPr>
-              <a:t>))</a:t>
+              <a:t>"animal_id"</a:t>
+            </a:r>
+            <a:r>
+              <a:rPr>
+                <a:solidFill>
+                  <a:srgbClr val="003B4F"/>
+                </a:solidFill>
+                <a:latin typeface="Courier"/>
+              </a:rPr>
+              <a:t>)) </a:t>
+            </a:r>
+            <a:r>
+              <a:rPr>
+                <a:solidFill>
+                  <a:srgbClr val="5E5E5E"/>
+                </a:solidFill>
+                <a:latin typeface="Courier"/>
+              </a:rPr>
+              <a:t>%&gt;%</a:t>
             </a:r>
             <a:br/>
-            <a:br/>
+            <a:r>
+              <a:rPr>
+                <a:solidFill>
+                  <a:srgbClr val="003B4F"/>
+                </a:solidFill>
+                <a:latin typeface="Courier"/>
+              </a:rPr>
+              <a:t>  </a:t>
+            </a:r>
             <a:r>
               <a:rPr>
                 <a:solidFill>
@@ -6888,7 +6898,7 @@
                 </a:solidFill>
                 <a:latin typeface="Courier"/>
               </a:rPr>
-              <a:t>(mappable_reports)</a:t>
+              <a:t>()</a:t>
             </a:r>
           </a:p>
           <a:p>
@@ -6899,7 +6909,7 @@
               <a:rPr>
                 <a:latin typeface="Courier"/>
               </a:rPr>
-              <a:t>[1] 4056</a:t>
+              <a:t>[1] 14</a:t>
             </a:r>
           </a:p>
         </p:txBody>
@@ -6980,21 +6990,21 @@
               <a:rPr>
                 <a:latin typeface="Courier"/>
               </a:rPr>
-              <a:t>semi_join</a:t>
-            </a:r>
-            <a:r>
-              <a:rPr/>
-              <a:t> result = the rows an </a:t>
-            </a:r>
-            <a:r>
-              <a:rPr>
-                <a:latin typeface="Courier"/>
-              </a:rPr>
-              <a:t>inner_join</a:t>
-            </a:r>
-            <a:r>
-              <a:rPr/>
-              <a:t> would keep, but without the extra columns</a:t>
+              <a:t>semi</a:t>
+            </a:r>
+            <a:r>
+              <a:rPr/>
+              <a:t> + </a:t>
+            </a:r>
+            <a:r>
+              <a:rPr>
+                <a:latin typeface="Courier"/>
+              </a:rPr>
+              <a:t>anti</a:t>
+            </a:r>
+            <a:r>
+              <a:rPr/>
+              <a:t> on the same table split it in two: recaptured vs never seen</a:t>
             </a:r>
           </a:p>
         </p:txBody>
@@ -7049,7 +7059,7 @@
             </a:pPr>
             <a:r>
               <a:rPr/>
-              <a:t>The Payoff — Build the Map-Ready Table</a:t>
+              <a:t>The Payoff — Build One Analysis-Ready Table</a:t>
             </a:r>
           </a:p>
         </p:txBody>
@@ -7079,7 +7089,7 @@
                 </a:solidFill>
                 <a:latin typeface="Courier"/>
               </a:rPr>
-              <a:t># Reports + coordinates, ready to map next week ------</a:t>
+              <a:t># Every KNOWN-individual capture, with the animal's attributes</a:t>
             </a:r>
             <a:br/>
             <a:r>
@@ -7089,7 +7099,7 @@
                 </a:solidFill>
                 <a:latin typeface="Courier"/>
               </a:rPr>
-              <a:t>bigfoot_mappable &lt;- reports_df </a:t>
+              <a:t>fisher_analysis &lt;- captures_df </a:t>
             </a:r>
             <a:r>
               <a:rPr>
@@ -7117,16 +7127,16 @@
                 </a:solidFill>
                 <a:latin typeface="Courier"/>
               </a:rPr>
-              <a:t>left_join</a:t>
-            </a:r>
-            <a:r>
-              <a:rPr>
-                <a:solidFill>
-                  <a:srgbClr val="003B4F"/>
-                </a:solidFill>
-                <a:latin typeface="Courier"/>
-              </a:rPr>
-              <a:t>(locations_df, </a:t>
+              <a:t>inner_join</a:t>
+            </a:r>
+            <a:r>
+              <a:rPr>
+                <a:solidFill>
+                  <a:srgbClr val="003B4F"/>
+                </a:solidFill>
+                <a:latin typeface="Courier"/>
+              </a:rPr>
+              <a:t>(individuals_df, </a:t>
             </a:r>
             <a:r>
               <a:rPr>
@@ -7171,7 +7181,7 @@
                 </a:solidFill>
                 <a:latin typeface="Courier"/>
               </a:rPr>
-              <a:t>"REPORT_NUMBER"</a:t>
+              <a:t>"animal_id"</a:t>
             </a:r>
             <a:r>
               <a:rPr>
@@ -7189,7 +7199,7 @@
                 </a:solidFill>
                 <a:latin typeface="Courier"/>
               </a:rPr>
-              <a:t>"number"</a:t>
+              <a:t>"fisher_id"</a:t>
             </a:r>
             <a:r>
               <a:rPr>
@@ -7226,7 +7236,7 @@
                 </a:solidFill>
                 <a:latin typeface="Courier"/>
               </a:rPr>
-              <a:t>filter</a:t>
+              <a:t>mutate</a:t>
             </a:r>
             <a:r>
               <a:rPr>
@@ -7240,56 +7250,56 @@
             <a:r>
               <a:rPr>
                 <a:solidFill>
+                  <a:srgbClr val="657422"/>
+                </a:solidFill>
+                <a:latin typeface="Courier"/>
+              </a:rPr>
+              <a:t>days_since_release =</a:t>
+            </a:r>
+            <a:r>
+              <a:rPr>
+                <a:solidFill>
+                  <a:srgbClr val="003B4F"/>
+                </a:solidFill>
+                <a:latin typeface="Courier"/>
+              </a:rPr>
+              <a:t> </a:t>
+            </a:r>
+            <a:r>
+              <a:rPr>
+                <a:solidFill>
+                  <a:srgbClr val="4758AB"/>
+                </a:solidFill>
+                <a:latin typeface="Courier"/>
+              </a:rPr>
+              <a:t>as.numeric</a:t>
+            </a:r>
+            <a:r>
+              <a:rPr>
+                <a:solidFill>
+                  <a:srgbClr val="003B4F"/>
+                </a:solidFill>
+                <a:latin typeface="Courier"/>
+              </a:rPr>
+              <a:t>(capture_date </a:t>
+            </a:r>
+            <a:r>
+              <a:rPr>
+                <a:solidFill>
                   <a:srgbClr val="5E5E5E"/>
                 </a:solidFill>
                 <a:latin typeface="Courier"/>
               </a:rPr>
-              <a:t>!</a:t>
-            </a:r>
-            <a:r>
-              <a:rPr>
-                <a:solidFill>
-                  <a:srgbClr val="4758AB"/>
-                </a:solidFill>
-                <a:latin typeface="Courier"/>
-              </a:rPr>
-              <a:t>is.na</a:t>
-            </a:r>
-            <a:r>
-              <a:rPr>
-                <a:solidFill>
-                  <a:srgbClr val="003B4F"/>
-                </a:solidFill>
-                <a:latin typeface="Courier"/>
-              </a:rPr>
-              <a:t>(latitude), </a:t>
-            </a:r>
-            <a:r>
-              <a:rPr>
-                <a:solidFill>
-                  <a:srgbClr val="5E5E5E"/>
-                </a:solidFill>
-                <a:latin typeface="Courier"/>
-              </a:rPr>
-              <a:t>!</a:t>
-            </a:r>
-            <a:r>
-              <a:rPr>
-                <a:solidFill>
-                  <a:srgbClr val="4758AB"/>
-                </a:solidFill>
-                <a:latin typeface="Courier"/>
-              </a:rPr>
-              <a:t>is.na</a:t>
-            </a:r>
-            <a:r>
-              <a:rPr>
-                <a:solidFill>
-                  <a:srgbClr val="003B4F"/>
-                </a:solidFill>
-                <a:latin typeface="Courier"/>
-              </a:rPr>
-              <a:t>(longitude))</a:t>
+              <a:t>-</a:t>
+            </a:r>
+            <a:r>
+              <a:rPr>
+                <a:solidFill>
+                  <a:srgbClr val="003B4F"/>
+                </a:solidFill>
+                <a:latin typeface="Courier"/>
+              </a:rPr>
+              <a:t> release_date))</a:t>
             </a:r>
             <a:br/>
             <a:br/>
@@ -7300,7 +7310,7 @@
                 </a:solidFill>
                 <a:latin typeface="Courier"/>
               </a:rPr>
-              <a:t>bigfoot_mappable </a:t>
+              <a:t>fisher_analysis </a:t>
             </a:r>
             <a:r>
               <a:rPr>
@@ -7337,7 +7347,7 @@
                 </a:solidFill>
                 <a:latin typeface="Courier"/>
               </a:rPr>
-              <a:t>(REPORT_NUMBER, STATE, SEASON, REPORT_CLASS, latitude, longitude) </a:t>
+              <a:t>(animal_id, sex, age_class, capture_date, days_since_release, mass_kg) </a:t>
             </a:r>
             <a:r>
               <a:rPr>
@@ -7386,14 +7396,14 @@
                 <a:latin typeface="Courier"/>
               </a:rPr>
               <a:t># A tibble: 6 × 6
-  REPORT_NUMBER STATE         SEASON REPORT_CLASS latitude longitude
-          &lt;dbl&gt; &lt;chr&gt;         &lt;chr&gt;  &lt;chr&gt;           &lt;dbl&gt;     &lt;dbl&gt;
-1          6496 Rhode Island  Fall   Class A          41.4     -71.5
-2          9765 Oklahoma      Fall   Class A          35.3     -99.2
-3          4983 Ohio          Summer Class A          39.4     -81.7
-4         31940 New York      Fall   Class A          41.3     -73.7
-5          5692 Nevada        Fall   Class B          39.6    -120. 
-6         55269 New Hampshire Summer Class A          43.4     -72.3</a:t>
+  animal_id sex   age_class capture_date days_since_release mass_kg
+  &lt;chr&gt;     &lt;chr&gt; &lt;chr&gt;     &lt;date&gt;                    &lt;dbl&gt;   &lt;dbl&gt;
+1 F07       F     juvenile  2018-03-25                 -244    1.4 
+2 F16       F     juvenile  2018-04-11                 -139    5.52
+3 F06       F     adult     2018-04-29                 -301    2.06
+4 F09       F     juvenile  2018-05-21                 -165    2.49
+5 F06       F     adult     2018-05-30                 -270    1.4 
+6 F02       F     juvenile  2018-06-08                 -153    4.21</a:t>
             </a:r>
           </a:p>
         </p:txBody>
@@ -7412,41 +7422,6 @@
         <p:txBody>
           <a:bodyPr/>
           <a:lstStyle/>
-          <a:p>
-            <a:pPr lvl="0" indent="0" marL="0">
-              <a:buNone/>
-            </a:pPr>
-            <a:r>
-              <a:rPr/>
-              <a:t>This joined table — report text </a:t>
-            </a:r>
-            <a:r>
-              <a:rPr b="1"/>
-              <a:t>plus</a:t>
-            </a:r>
-            <a:r>
-              <a:rPr/>
-              <a:t> coordinates — is essentially </a:t>
-            </a:r>
-            <a:r>
-              <a:rPr>
-                <a:latin typeface="Courier"/>
-              </a:rPr>
-              <a:t>bfro_reports_geocoded.csv</a:t>
-            </a:r>
-            <a:r>
-              <a:rPr/>
-              <a:t>, the file you’ll turn into a map in </a:t>
-            </a:r>
-            <a:r>
-              <a:rPr b="1"/>
-              <a:t>Lecture 13</a:t>
-            </a:r>
-            <a:r>
-              <a:rPr/>
-              <a:t>.</a:t>
-            </a:r>
-          </a:p>
           <a:p>
             <a:pPr lvl="0" indent="0" marL="0">
               <a:buNone/>
@@ -7463,11 +7438,38 @@
               <a:rPr>
                 <a:latin typeface="Courier"/>
               </a:rPr>
-              <a:t>bigfoot_mappable</a:t>
-            </a:r>
-            <a:r>
-              <a:rPr/>
-              <a:t> didn’t exist in either source file — it only exists because you joined them on a key, and it’s the exact table Lecture 13 opens with.</a:t>
+              <a:t>fisher_analysis</a:t>
+            </a:r>
+            <a:r>
+              <a:rPr/>
+              <a:t> didn’t exist in either source file — every row is a capture event </a:t>
+            </a:r>
+            <a:r>
+              <a:rPr i="1"/>
+              <a:t>plus</a:t>
+            </a:r>
+            <a:r>
+              <a:rPr/>
+              <a:t> the animal’s sex, age, and days-since-release, ready for a model.</a:t>
+            </a:r>
+          </a:p>
+          <a:p>
+            <a:pPr lvl="0" indent="0" marL="0">
+              <a:buNone/>
+            </a:pPr>
+            <a:r>
+              <a:rPr/>
+              <a:t>Here </a:t>
+            </a:r>
+            <a:r>
+              <a:rPr>
+                <a:latin typeface="Courier"/>
+              </a:rPr>
+              <a:t>inner_join</a:t>
+            </a:r>
+            <a:r>
+              <a:rPr/>
+              <a:t> is right: an event with no known animal can’t go into an individual-level analysis.</a:t>
             </a:r>
           </a:p>
         </p:txBody>
@@ -7554,7 +7556,7 @@
             </a:r>
             <a:r>
               <a:rPr/>
-              <a:t> to find the un-geocoded reports, </a:t>
+              <a:t> both directions to find the gaps, </a:t>
             </a:r>
             <a:r>
               <a:rPr>
@@ -7564,7 +7566,7 @@
             </a:r>
             <a:r>
               <a:rPr/>
-              <a:t> to keep the mappable ones, and build the combined table. Predict the counts first.</a:t>
+              <a:t> to see who was recaptured, and build the combined table. Predict the counts first.</a:t>
             </a:r>
           </a:p>
         </p:txBody>
@@ -7847,11 +7849,11 @@
               <a:rPr>
                 <a:latin typeface="Courier"/>
               </a:rPr>
-              <a:t>distinct()</a:t>
-            </a:r>
-            <a:r>
-              <a:rPr/>
-              <a:t> + </a:t>
+              <a:t>str_to_upper()</a:t>
+            </a:r>
+            <a:r>
+              <a:rPr/>
+              <a:t> (and </a:t>
             </a:r>
             <a:r>
               <a:rPr>
@@ -7861,7 +7863,17 @@
             </a:r>
             <a:r>
               <a:rPr/>
-              <a:t> for key hygiene</a:t>
+              <a:t>, </a:t>
+            </a:r>
+            <a:r>
+              <a:rPr>
+                <a:latin typeface="Courier"/>
+              </a:rPr>
+              <a:t>str_trim()</a:t>
+            </a:r>
+            <a:r>
+              <a:rPr/>
+              <a:t>) for key hygiene</a:t>
             </a:r>
           </a:p>
         </p:txBody>
@@ -7921,18 +7933,14 @@
             </a:pPr>
             <a:r>
               <a:rPr b="1"/>
-              <a:t>Up next — Lecture 18:</a:t>
+              <a:t>Up next — Mapping:</a:t>
             </a:r>
           </a:p>
           <a:p>
             <a:pPr lvl="0"/>
             <a:r>
-              <a:rPr b="1"/>
-              <a:t>Mapping</a:t>
-            </a:r>
-            <a:r>
-              <a:rPr/>
-              <a:t> — turn this joined table into a map with </a:t>
+              <a:rPr/>
+              <a:t>Turn latitude/longitude into a map with </a:t>
             </a:r>
             <a:r>
               <a:rPr>
@@ -7955,15 +7963,7 @@
             <a:pPr lvl="0"/>
             <a:r>
               <a:rPr/>
-              <a:t>Where </a:t>
-            </a:r>
-            <a:r>
-              <a:rPr i="1"/>
-              <a:t>is</a:t>
-            </a:r>
-            <a:r>
-              <a:rPr/>
-              <a:t> Bigfoot, anyway?</a:t>
+              <a:t>A different dataset (Bigfoot sightings) — same join thinking</a:t>
             </a:r>
           </a:p>
         </p:txBody>
@@ -8139,7 +8139,7 @@
             <a:pPr lvl="0"/>
             <a:r>
               <a:rPr/>
-              <a:t>Build the combined report + coordinates table</a:t>
+              <a:t>Build one combined capture + individual table</a:t>
             </a:r>
           </a:p>
         </p:txBody>
@@ -8186,7 +8186,7 @@
             </a:pPr>
             <a:r>
               <a:rPr b="1"/>
-              <a:t>Data (two tables):</a:t>
+              <a:t>Data (two tables, simulated):</a:t>
             </a:r>
           </a:p>
           <a:p>
@@ -8195,11 +8195,11 @@
               <a:rPr>
                 <a:latin typeface="Courier"/>
               </a:rPr>
-              <a:t>bfro_reports.csv</a:t>
-            </a:r>
-            <a:r>
-              <a:rPr/>
-              <a:t> — the report text + class</a:t>
+              <a:t>fisher_captures.csv</a:t>
+            </a:r>
+            <a:r>
+              <a:rPr/>
+              <a:t> — one row per capture event</a:t>
             </a:r>
           </a:p>
           <a:p>
@@ -8208,11 +8208,11 @@
               <a:rPr>
                 <a:latin typeface="Courier"/>
               </a:rPr>
-              <a:t>bfro_locations.csv</a:t>
-            </a:r>
-            <a:r>
-              <a:rPr/>
-              <a:t> — the coordinates</a:t>
+              <a:t>fisher_individuals.csv</a:t>
+            </a:r>
+            <a:r>
+              <a:rPr/>
+              <a:t> — one row per released fisher</a:t>
             </a:r>
           </a:p>
           <a:p>
@@ -8746,7 +8746,7 @@
                 </a:solidFill>
                 <a:latin typeface="Courier"/>
               </a:rPr>
-              <a:t># Load BOTH Bigfoot tables ---------------------------</a:t>
+              <a:t># Load BOTH fisher tables ----------------------------</a:t>
             </a:r>
             <a:br/>
             <a:r>
@@ -8776,7 +8776,7 @@
                 </a:solidFill>
                 <a:latin typeface="Courier"/>
               </a:rPr>
-              <a:t>reports_df   &lt;- </a:t>
+              <a:t>captures_df    &lt;- </a:t>
             </a:r>
             <a:r>
               <a:rPr>
@@ -8803,7 +8803,7 @@
                 </a:solidFill>
                 <a:latin typeface="Courier"/>
               </a:rPr>
-              <a:t>"data/bfro_reports.csv"</a:t>
+              <a:t>"data/fisher_captures.csv"</a:t>
             </a:r>
             <a:r>
               <a:rPr>
@@ -8822,7 +8822,7 @@
                 </a:solidFill>
                 <a:latin typeface="Courier"/>
               </a:rPr>
-              <a:t>locations_df &lt;- </a:t>
+              <a:t>individuals_df &lt;- </a:t>
             </a:r>
             <a:r>
               <a:rPr>
@@ -8849,7 +8849,7 @@
                 </a:solidFill>
                 <a:latin typeface="Courier"/>
               </a:rPr>
-              <a:t>"data/bfro_locations.csv"</a:t>
+              <a:t>"data/fisher_individuals.csv"</a:t>
             </a:r>
             <a:r>
               <a:rPr>
@@ -8878,7 +8878,7 @@
                 </a:solidFill>
                 <a:latin typeface="Courier"/>
               </a:rPr>
-              <a:t>(reports_df)      </a:t>
+              <a:t>(captures_df)       </a:t>
             </a:r>
             <a:r>
               <a:rPr>
@@ -8887,7 +8887,7 @@
                 </a:solidFill>
                 <a:latin typeface="Courier"/>
               </a:rPr>
-              <a:t># the text: where/when/what</a:t>
+              <a:t># field events: when/where/mass/collar</a:t>
             </a:r>
           </a:p>
           <a:p>
@@ -8898,7 +8898,7 @@
               <a:rPr>
                 <a:latin typeface="Courier"/>
               </a:rPr>
-              <a:t>[1] 5485   19</a:t>
+              <a:t>[1] 45  6</a:t>
             </a:r>
           </a:p>
           <a:p>
@@ -8921,7 +8921,7 @@
                 </a:solidFill>
                 <a:latin typeface="Courier"/>
               </a:rPr>
-              <a:t>(locations_df)    </a:t>
+              <a:t>(individuals_df)    </a:t>
             </a:r>
             <a:r>
               <a:rPr>
@@ -8930,7 +8930,7 @@
                 </a:solidFill>
                 <a:latin typeface="Courier"/>
               </a:rPr>
-              <a:t># the coordinates</a:t>
+              <a:t># released animals: sex/age/source/site</a:t>
             </a:r>
           </a:p>
           <a:p>
@@ -8941,7 +8941,7 @@
               <a:rPr>
                 <a:latin typeface="Courier"/>
               </a:rPr>
-              <a:t>[1] 4250    7</a:t>
+              <a:t>[1] 18  6</a:t>
             </a:r>
           </a:p>
         </p:txBody>
@@ -8966,11 +8966,11 @@
               <a:rPr b="1">
                 <a:latin typeface="Courier"/>
               </a:rPr>
-              <a:t>reports_df</a:t>
-            </a:r>
-            <a:r>
-              <a:rPr/>
-              <a:t> — one row per sighting report: year, season, state, county, class, and the written account</a:t>
+              <a:t>captures_df</a:t>
+            </a:r>
+            <a:r>
+              <a:rPr/>
+              <a:t> — one row per capture event: date, site, mass, collar id</a:t>
             </a:r>
           </a:p>
           <a:p>
@@ -8979,18 +8979,18 @@
               <a:rPr b="1">
                 <a:latin typeface="Courier"/>
               </a:rPr>
-              <a:t>locations_df</a:t>
-            </a:r>
-            <a:r>
-              <a:rPr/>
-              <a:t> — one row per report that got geocoded: a latitude and longitude</a:t>
+              <a:t>individuals_df</a:t>
+            </a:r>
+            <a:r>
+              <a:rPr/>
+              <a:t> — one row per released fisher: sex, age class, source, release site</a:t>
             </a:r>
           </a:p>
           <a:p>
             <a:pPr lvl="0"/>
             <a:r>
               <a:rPr/>
-              <a:t>To map a sighting you need </a:t>
+              <a:t>To use a capture you often need </a:t>
             </a:r>
             <a:r>
               <a:rPr b="1"/>
@@ -8998,7 +8998,7 @@
             </a:r>
             <a:r>
               <a:rPr/>
-              <a:t> — its class </a:t>
+              <a:t> — the event </a:t>
             </a:r>
             <a:r>
               <a:rPr i="1"/>
@@ -9006,7 +9006,7 @@
             </a:r>
             <a:r>
               <a:rPr/>
-              <a:t> its coordinates</a:t>
+              <a:t> who the animal is</a:t>
             </a:r>
           </a:p>
         </p:txBody>
@@ -9091,7 +9091,7 @@
                 </a:solidFill>
                 <a:latin typeface="Courier"/>
               </a:rPr>
-              <a:t># The columns that identify a report -----------------</a:t>
+              <a:t># The columns that identify an animal ---------------</a:t>
             </a:r>
             <a:br/>
             <a:r>
@@ -9101,7 +9101,7 @@
                 </a:solidFill>
                 <a:latin typeface="Courier"/>
               </a:rPr>
-              <a:t>reports_df </a:t>
+              <a:t>captures_df    </a:t>
             </a:r>
             <a:r>
               <a:rPr>
@@ -9137,7 +9137,7 @@
                 </a:solidFill>
                 <a:latin typeface="Courier"/>
               </a:rPr>
-              <a:t>(REPORT_NUMBER, YEAR, STATE, REPORT_CLASS) </a:t>
+              <a:t>(animal_id, capture_date, site, mass_kg) </a:t>
             </a:r>
             <a:r>
               <a:rPr>
@@ -9203,11 +9203,11 @@
                 <a:latin typeface="Courier"/>
               </a:rPr>
               <a:t># A tibble: 3 × 4
-  REPORT_NUMBER YEAR         STATE        REPORT_CLASS
-          &lt;dbl&gt; &lt;chr&gt;        &lt;chr&gt;        &lt;chr&gt;       
-1         30680 2010         Alabama      Class B     
-2          1261 Early 1990's Alaska       Class A     
-3          6496 1974         Rhode Island Class A     </a:t>
+  animal_id capture_date site       mass_kg
+  &lt;chr&gt;     &lt;date&gt;       &lt;chr&gt;        &lt;dbl&gt;
+1 f07       2018-03-25   Snoqualmie    1.4 
+2 f16       2018-04-11   Mt Rainier    5.52
+3 f06       2018-04-29   Snoqualmie    2.06</a:t>
             </a:r>
           </a:p>
           <a:p>
@@ -9221,7 +9221,7 @@
                 </a:solidFill>
                 <a:latin typeface="Courier"/>
               </a:rPr>
-              <a:t>locations_df </a:t>
+              <a:t>individuals_df </a:t>
             </a:r>
             <a:r>
               <a:rPr>
@@ -9257,7 +9257,7 @@
                 </a:solidFill>
                 <a:latin typeface="Courier"/>
               </a:rPr>
-              <a:t>(number, latitude, longitude) </a:t>
+              <a:t>(fisher_id, sex, site, release_date) </a:t>
             </a:r>
             <a:r>
               <a:rPr>
@@ -9322,12 +9322,12 @@
               <a:rPr>
                 <a:latin typeface="Courier"/>
               </a:rPr>
-              <a:t># A tibble: 3 × 3
-  number latitude longitude
-   &lt;dbl&gt;    &lt;dbl&gt;     &lt;dbl&gt;
-1    637     61.5     -143.
-2   2917     55.2     -133.
-3   7963     55.2     -133.</a:t>
+              <a:t># A tibble: 3 × 4
+  fisher_id sex   site       release_date
+  &lt;chr&gt;     &lt;chr&gt; &lt;chr&gt;      &lt;date&gt;      
+1 F01       F     Mt Rainier 2019-05-10  
+2 F02       F     Mt Rainier 2018-11-08  
+3 F03       M     Snoqualmie 2018-02-07  </a:t>
             </a:r>
           </a:p>
         </p:txBody>
@@ -9360,7 +9360,7 @@
             </a:r>
             <a:r>
               <a:rPr/>
-              <a:t> is the column that uniquely identifies a row and links the tables.</a:t>
+              <a:t> is the column that identifies an animal and links the tables.</a:t>
             </a:r>
           </a:p>
           <a:p>
@@ -9373,7 +9373,7 @@
               <a:rPr>
                 <a:latin typeface="Courier"/>
               </a:rPr>
-              <a:t>reports_df</a:t>
+              <a:t>captures_df</a:t>
             </a:r>
             <a:r>
               <a:rPr/>
@@ -9383,7 +9383,7 @@
               <a:rPr b="1">
                 <a:latin typeface="Courier"/>
               </a:rPr>
-              <a:t>REPORT_NUMBER</a:t>
+              <a:t>animal_id</a:t>
             </a:r>
           </a:p>
           <a:p>
@@ -9396,7 +9396,7 @@
               <a:rPr>
                 <a:latin typeface="Courier"/>
               </a:rPr>
-              <a:t>locations_df</a:t>
+              <a:t>individuals_df</a:t>
             </a:r>
             <a:r>
               <a:rPr/>
@@ -9406,7 +9406,7 @@
               <a:rPr b="1">
                 <a:latin typeface="Courier"/>
               </a:rPr>
-              <a:t>number</a:t>
+              <a:t>fisher_id</a:t>
             </a:r>
           </a:p>
           <a:p>
@@ -9452,17 +9452,35 @@
             </a:r>
             <a:r>
               <a:rPr sz="2000"/>
-              <a:t> in the table you’re looking things up in (</a:t>
+              <a:t> in the table you look things up in (</a:t>
             </a:r>
             <a:r>
               <a:rPr sz="2000">
                 <a:latin typeface="Courier"/>
               </a:rPr>
-              <a:t>locations_df</a:t>
+              <a:t>individuals_df</a:t>
             </a:r>
             <a:r>
               <a:rPr sz="2000"/>
-              <a:t>).</a:t>
+              <a:t> — one row per fisher). It is </a:t>
+            </a:r>
+            <a:r>
+              <a:rPr sz="2000" i="1"/>
+              <a:t>not</a:t>
+            </a:r>
+            <a:r>
+              <a:rPr sz="2000"/>
+              <a:t> unique in </a:t>
+            </a:r>
+            <a:r>
+              <a:rPr sz="2000">
+                <a:latin typeface="Courier"/>
+              </a:rPr>
+              <a:t>captures_df</a:t>
+            </a:r>
+            <a:r>
+              <a:rPr sz="2000"/>
+              <a:t> — a fisher can be caught many times.</a:t>
             </a:r>
           </a:p>
         </p:txBody>
@@ -9547,7 +9565,7 @@
                 </a:solidFill>
                 <a:latin typeface="Courier"/>
               </a:rPr>
-              <a:t># Two fixes: drop duplicate reports, match key type --</a:t>
+              <a:t># The capture key is lowercase; the individual key is not</a:t>
             </a:r>
             <a:br/>
             <a:r>
@@ -9557,7 +9575,7 @@
                 </a:solidFill>
                 <a:latin typeface="Courier"/>
               </a:rPr>
-              <a:t>reports_df &lt;- reports_df </a:t>
+              <a:t>captures_df </a:t>
             </a:r>
             <a:r>
               <a:rPr>
@@ -9568,6 +9586,111 @@
               </a:rPr>
               <a:t>%&gt;%</a:t>
             </a:r>
+            <a:r>
+              <a:rPr>
+                <a:solidFill>
+                  <a:srgbClr val="003B4F"/>
+                </a:solidFill>
+                <a:latin typeface="Courier"/>
+              </a:rPr>
+              <a:t> </a:t>
+            </a:r>
+            <a:r>
+              <a:rPr>
+                <a:solidFill>
+                  <a:srgbClr val="4758AB"/>
+                </a:solidFill>
+                <a:latin typeface="Courier"/>
+              </a:rPr>
+              <a:t>count</a:t>
+            </a:r>
+            <a:r>
+              <a:rPr>
+                <a:solidFill>
+                  <a:srgbClr val="003B4F"/>
+                </a:solidFill>
+                <a:latin typeface="Courier"/>
+              </a:rPr>
+              <a:t>(animal_id) </a:t>
+            </a:r>
+            <a:r>
+              <a:rPr>
+                <a:solidFill>
+                  <a:srgbClr val="5E5E5E"/>
+                </a:solidFill>
+                <a:latin typeface="Courier"/>
+              </a:rPr>
+              <a:t>%&gt;%</a:t>
+            </a:r>
+            <a:r>
+              <a:rPr>
+                <a:solidFill>
+                  <a:srgbClr val="003B4F"/>
+                </a:solidFill>
+                <a:latin typeface="Courier"/>
+              </a:rPr>
+              <a:t> </a:t>
+            </a:r>
+            <a:r>
+              <a:rPr>
+                <a:solidFill>
+                  <a:srgbClr val="4758AB"/>
+                </a:solidFill>
+                <a:latin typeface="Courier"/>
+              </a:rPr>
+              <a:t>head</a:t>
+            </a:r>
+            <a:r>
+              <a:rPr>
+                <a:solidFill>
+                  <a:srgbClr val="003B4F"/>
+                </a:solidFill>
+                <a:latin typeface="Courier"/>
+              </a:rPr>
+              <a:t>()</a:t>
+            </a:r>
+          </a:p>
+          <a:p>
+            <a:pPr lvl="0" indent="0">
+              <a:buNone/>
+            </a:pPr>
+            <a:r>
+              <a:rPr>
+                <a:latin typeface="Courier"/>
+              </a:rPr>
+              <a:t># A tibble: 6 × 2
+  animal_id     n
+  &lt;chr&gt;     &lt;int&gt;
+1 f01           3
+2 f02           4
+3 f03           2
+4 f05           3
+5 f06           5
+6 f07           5</a:t>
+            </a:r>
+          </a:p>
+          <a:p>
+            <a:pPr lvl="0" indent="0">
+              <a:buNone/>
+            </a:pPr>
+            <a:r>
+              <a:rPr>
+                <a:solidFill>
+                  <a:srgbClr val="003B4F"/>
+                </a:solidFill>
+                <a:latin typeface="Courier"/>
+              </a:rPr>
+              <a:t>captures_df &lt;- captures_df </a:t>
+            </a:r>
+            <a:r>
+              <a:rPr>
+                <a:solidFill>
+                  <a:srgbClr val="5E5E5E"/>
+                </a:solidFill>
+                <a:latin typeface="Courier"/>
+              </a:rPr>
+              <a:t>%&gt;%</a:t>
+            </a:r>
             <a:br/>
             <a:r>
               <a:rPr>
@@ -9585,16 +9708,16 @@
                 </a:solidFill>
                 <a:latin typeface="Courier"/>
               </a:rPr>
-              <a:t>distinct</a:t>
-            </a:r>
-            <a:r>
-              <a:rPr>
-                <a:solidFill>
-                  <a:srgbClr val="003B4F"/>
-                </a:solidFill>
-                <a:latin typeface="Courier"/>
-              </a:rPr>
-              <a:t>(REPORT_NUMBER, </a:t>
+              <a:t>mutate</a:t>
+            </a:r>
+            <a:r>
+              <a:rPr>
+                <a:solidFill>
+                  <a:srgbClr val="003B4F"/>
+                </a:solidFill>
+                <a:latin typeface="Courier"/>
+              </a:rPr>
+              <a:t>(</a:t>
             </a:r>
             <a:r>
               <a:rPr>
@@ -9603,7 +9726,7 @@
                 </a:solidFill>
                 <a:latin typeface="Courier"/>
               </a:rPr>
-              <a:t>.keep_all =</a:t>
+              <a:t>animal_id =</a:t>
             </a:r>
             <a:r>
               <a:rPr>
@@ -9617,20 +9740,20 @@
             <a:r>
               <a:rPr>
                 <a:solidFill>
-                  <a:srgbClr val="8F5902"/>
-                </a:solidFill>
-                <a:latin typeface="Courier"/>
-              </a:rPr>
-              <a:t>TRUE</a:t>
-            </a:r>
-            <a:r>
-              <a:rPr>
-                <a:solidFill>
-                  <a:srgbClr val="003B4F"/>
-                </a:solidFill>
-                <a:latin typeface="Courier"/>
-              </a:rPr>
-              <a:t>) </a:t>
+                  <a:srgbClr val="4758AB"/>
+                </a:solidFill>
+                <a:latin typeface="Courier"/>
+              </a:rPr>
+              <a:t>str_to_upper</a:t>
+            </a:r>
+            <a:r>
+              <a:rPr>
+                <a:solidFill>
+                  <a:srgbClr val="003B4F"/>
+                </a:solidFill>
+                <a:latin typeface="Courier"/>
+              </a:rPr>
+              <a:t>(animal_id))   </a:t>
             </a:r>
             <a:r>
               <a:rPr>
@@ -9639,89 +9762,7 @@
                 </a:solidFill>
                 <a:latin typeface="Courier"/>
               </a:rPr>
-              <a:t>%&gt;%</a:t>
-            </a:r>
-            <a:r>
-              <a:rPr>
-                <a:solidFill>
-                  <a:srgbClr val="003B4F"/>
-                </a:solidFill>
-                <a:latin typeface="Courier"/>
-              </a:rPr>
-              <a:t>   </a:t>
-            </a:r>
-            <a:r>
-              <a:rPr>
-                <a:solidFill>
-                  <a:srgbClr val="5E5E5E"/>
-                </a:solidFill>
-                <a:latin typeface="Courier"/>
-              </a:rPr>
-              <a:t># one row per report</a:t>
-            </a:r>
-            <a:br/>
-            <a:r>
-              <a:rPr>
-                <a:solidFill>
-                  <a:srgbClr val="003B4F"/>
-                </a:solidFill>
-                <a:latin typeface="Courier"/>
-              </a:rPr>
-              <a:t>  </a:t>
-            </a:r>
-            <a:r>
-              <a:rPr>
-                <a:solidFill>
-                  <a:srgbClr val="4758AB"/>
-                </a:solidFill>
-                <a:latin typeface="Courier"/>
-              </a:rPr>
-              <a:t>mutate</a:t>
-            </a:r>
-            <a:r>
-              <a:rPr>
-                <a:solidFill>
-                  <a:srgbClr val="003B4F"/>
-                </a:solidFill>
-                <a:latin typeface="Courier"/>
-              </a:rPr>
-              <a:t>(</a:t>
-            </a:r>
-            <a:r>
-              <a:rPr>
-                <a:solidFill>
-                  <a:srgbClr val="657422"/>
-                </a:solidFill>
-                <a:latin typeface="Courier"/>
-              </a:rPr>
-              <a:t>REPORT_NUMBER =</a:t>
-            </a:r>
-            <a:r>
-              <a:rPr>
-                <a:solidFill>
-                  <a:srgbClr val="003B4F"/>
-                </a:solidFill>
-                <a:latin typeface="Courier"/>
-              </a:rPr>
-              <a:t> </a:t>
-            </a:r>
-            <a:r>
-              <a:rPr>
-                <a:solidFill>
-                  <a:srgbClr val="4758AB"/>
-                </a:solidFill>
-                <a:latin typeface="Courier"/>
-              </a:rPr>
-              <a:t>as.integer</a:t>
-            </a:r>
-            <a:r>
-              <a:rPr>
-                <a:solidFill>
-                  <a:srgbClr val="003B4F"/>
-                </a:solidFill>
-                <a:latin typeface="Courier"/>
-              </a:rPr>
-              <a:t>(REPORT_NUMBER))</a:t>
+              <a:t># "f07" -&gt; "F07"</a:t>
             </a:r>
             <a:br/>
             <a:br/>
@@ -9741,7 +9782,7 @@
                 </a:solidFill>
                 <a:latin typeface="Courier"/>
               </a:rPr>
-              <a:t>(reports_df</a:t>
+              <a:t>(individuals_df</a:t>
             </a:r>
             <a:r>
               <a:rPr>
@@ -9759,7 +9800,7 @@
                 </a:solidFill>
                 <a:latin typeface="Courier"/>
               </a:rPr>
-              <a:t>REPORT_NUMBER)</a:t>
+              <a:t>fisher_id)</a:t>
             </a:r>
           </a:p>
           <a:p>
@@ -9770,7 +9811,7 @@
               <a:rPr>
                 <a:latin typeface="Courier"/>
               </a:rPr>
-              <a:t>[1] 5022</a:t>
+              <a:t>[1] 18</a:t>
             </a:r>
           </a:p>
           <a:p>
@@ -9793,7 +9834,7 @@
                 </a:solidFill>
                 <a:latin typeface="Courier"/>
               </a:rPr>
-              <a:t>(locations_df</a:t>
+              <a:t>(captures_df</a:t>
             </a:r>
             <a:r>
               <a:rPr>
@@ -9811,7 +9852,16 @@
                 </a:solidFill>
                 <a:latin typeface="Courier"/>
               </a:rPr>
-              <a:t>number)</a:t>
+              <a:t>animal_id)   </a:t>
+            </a:r>
+            <a:r>
+              <a:rPr>
+                <a:solidFill>
+                  <a:srgbClr val="5E5E5E"/>
+                </a:solidFill>
+                <a:latin typeface="Courier"/>
+              </a:rPr>
+              <a:t># includes "UNK" — unmarked animals</a:t>
             </a:r>
           </a:p>
           <a:p>
@@ -9822,7 +9872,7 @@
               <a:rPr>
                 <a:latin typeface="Courier"/>
               </a:rPr>
-              <a:t>[1] 4250</a:t>
+              <a:t>[1] 15</a:t>
             </a:r>
           </a:p>
         </p:txBody>
@@ -9847,11 +9897,59 @@
               <a:rPr>
                 <a:latin typeface="Courier"/>
               </a:rPr>
-              <a:t>distinct()</a:t>
-            </a:r>
-            <a:r>
-              <a:rPr/>
-              <a:t> — keep one row per report number</a:t>
+              <a:t>str_to_upper()</a:t>
+            </a:r>
+            <a:r>
+              <a:rPr/>
+              <a:t> — </a:t>
+            </a:r>
+            <a:r>
+              <a:rPr>
+                <a:latin typeface="Courier"/>
+              </a:rPr>
+              <a:t>animal_id</a:t>
+            </a:r>
+            <a:r>
+              <a:rPr/>
+              <a:t> was </a:t>
+            </a:r>
+            <a:r>
+              <a:rPr>
+                <a:latin typeface="Courier"/>
+              </a:rPr>
+              <a:t>"f07"</a:t>
+            </a:r>
+            <a:r>
+              <a:rPr/>
+              <a:t>, </a:t>
+            </a:r>
+            <a:r>
+              <a:rPr>
+                <a:latin typeface="Courier"/>
+              </a:rPr>
+              <a:t>fisher_id</a:t>
+            </a:r>
+            <a:r>
+              <a:rPr/>
+              <a:t> is </a:t>
+            </a:r>
+            <a:r>
+              <a:rPr>
+                <a:latin typeface="Courier"/>
+              </a:rPr>
+              <a:t>"F07"</a:t>
+            </a:r>
+            <a:r>
+              <a:rPr/>
+              <a:t>. </a:t>
+            </a:r>
+            <a:r>
+              <a:rPr b="1"/>
+              <a:t>Case must match</a:t>
+            </a:r>
+            <a:r>
+              <a:rPr/>
+              <a:t> or the join finds nothing</a:t>
             </a:r>
           </a:p>
           <a:p>
@@ -9860,59 +9958,11 @@
               <a:rPr>
                 <a:latin typeface="Courier"/>
               </a:rPr>
-              <a:t>as.integer()</a:t>
-            </a:r>
-            <a:r>
-              <a:rPr/>
-              <a:t> — </a:t>
-            </a:r>
-            <a:r>
-              <a:rPr>
-                <a:latin typeface="Courier"/>
-              </a:rPr>
-              <a:t>REPORT_NUMBER</a:t>
-            </a:r>
-            <a:r>
-              <a:rPr/>
-              <a:t> was stored like </a:t>
-            </a:r>
-            <a:r>
-              <a:rPr>
-                <a:latin typeface="Courier"/>
-              </a:rPr>
-              <a:t>30680.0</a:t>
-            </a:r>
-            <a:r>
-              <a:rPr/>
-              <a:t>; </a:t>
-            </a:r>
-            <a:r>
-              <a:rPr>
-                <a:latin typeface="Courier"/>
-              </a:rPr>
-              <a:t>number</a:t>
-            </a:r>
-            <a:r>
-              <a:rPr/>
-              <a:t> is </a:t>
-            </a:r>
-            <a:r>
-              <a:rPr>
-                <a:latin typeface="Courier"/>
-              </a:rPr>
-              <a:t>30680</a:t>
-            </a:r>
-            <a:r>
-              <a:rPr/>
-              <a:t>. </a:t>
-            </a:r>
-            <a:r>
-              <a:rPr b="1"/>
-              <a:t>Keys must be the same type</a:t>
-            </a:r>
-            <a:r>
-              <a:rPr/>
-              <a:t> to match</a:t>
+              <a:t>"UNK"</a:t>
+            </a:r>
+            <a:r>
+              <a:rPr/>
+              <a:t> is not a real fisher — those events have no individual to attach</a:t>
             </a:r>
           </a:p>
           <a:p>
@@ -9934,19 +9984,27 @@
             </a:r>
             <a:r>
               <a:rPr sz="2000"/>
-              <a:t> A join silently fails to match if the keys are different </a:t>
+              <a:t> A join silently fails to match if the keys differ in </a:t>
             </a:r>
             <a:r>
               <a:rPr sz="2000" b="1"/>
-              <a:t>types</a:t>
+              <a:t>type</a:t>
             </a:r>
             <a:r>
               <a:rPr sz="2000"/>
-              <a:t> (text vs number) or </a:t>
+              <a:t> (text vs number), </a:t>
             </a:r>
             <a:r>
               <a:rPr sz="2000" b="1"/>
-              <a:t>formats</a:t>
+              <a:t>case</a:t>
+            </a:r>
+            <a:r>
+              <a:rPr sz="2000"/>
+              <a:t>, or </a:t>
+            </a:r>
+            <a:r>
+              <a:rPr sz="2000" b="1"/>
+              <a:t>format</a:t>
             </a:r>
             <a:r>
               <a:rPr sz="2000"/>
@@ -10027,7 +10085,7 @@
             </a:pPr>
             <a:r>
               <a:rPr/>
-              <a:t>Load both tables, find the key in each, and clean it. Predict how many reports have coordinates before we join.</a:t>
+              <a:t>Load both tables, find the key in each, and fix its case. Predict how many capture events can be tied to a known fisher.</a:t>
             </a:r>
           </a:p>
         </p:txBody>

--- a/docs/content/joins/joins_lecture.pptx
+++ b/docs/content/joins/joins_lecture.pptx
@@ -3365,7 +3365,7 @@
             </a:pPr>
             <a:r>
               <a:rPr/>
-              <a:t>2026-08-27</a:t>
+              <a:t>2026-09-01</a:t>
             </a:r>
           </a:p>
         </p:txBody>

--- a/docs/content/joins/joins_lecture.pptx
+++ b/docs/content/joins/joins_lecture.pptx
@@ -3365,7 +3365,7 @@
             </a:pPr>
             <a:r>
               <a:rPr/>
-              <a:t>2026-09-01</a:t>
+              <a:t>2026-09-03</a:t>
             </a:r>
           </a:p>
         </p:txBody>

--- a/docs/content/joins/joins_lecture.pptx
+++ b/docs/content/joins/joins_lecture.pptx
@@ -3365,7 +3365,7 @@
             </a:pPr>
             <a:r>
               <a:rPr/>
-              <a:t>2026-09-03</a:t>
+              <a:t>2026-09-04</a:t>
             </a:r>
           </a:p>
         </p:txBody>
